--- a/Major_Project_Presentation.pptx
+++ b/Major_Project_Presentation.pptx
@@ -5,20 +5,20 @@
     <p:sldMasterId id="2147483648" r:id="rId1"/>
   </p:sldMasterIdLst>
   <p:sldIdLst>
-    <p:sldId id="256" r:id="rId7"/>
-    <p:sldId id="257" r:id="rId8"/>
-    <p:sldId id="258" r:id="rId9"/>
-    <p:sldId id="259" r:id="rId10"/>
-    <p:sldId id="260" r:id="rId11"/>
-    <p:sldId id="261" r:id="rId12"/>
-    <p:sldId id="262" r:id="rId13"/>
-    <p:sldId id="263" r:id="rId14"/>
-    <p:sldId id="264" r:id="rId15"/>
-    <p:sldId id="265" r:id="rId16"/>
-    <p:sldId id="266" r:id="rId17"/>
-    <p:sldId id="267" r:id="rId18"/>
+    <p:sldId id="256" r:id="rId2"/>
+    <p:sldId id="257" r:id="rId3"/>
+    <p:sldId id="258" r:id="rId4"/>
+    <p:sldId id="259" r:id="rId5"/>
+    <p:sldId id="260" r:id="rId6"/>
+    <p:sldId id="261" r:id="rId7"/>
+    <p:sldId id="262" r:id="rId8"/>
+    <p:sldId id="263" r:id="rId9"/>
+    <p:sldId id="264" r:id="rId10"/>
+    <p:sldId id="265" r:id="rId11"/>
+    <p:sldId id="266" r:id="rId12"/>
+    <p:sldId id="267" r:id="rId13"/>
   </p:sldIdLst>
-  <p:sldSz cx="12188952" cy="6858000" type="screen4x3"/>
+  <p:sldSz cx="12188825" cy="6858000"/>
   <p:notesSz cx="6858000" cy="9144000"/>
   <p:defaultTextStyle>
     <a:defPPr>
@@ -115,6 +115,22 @@
       </a:defRPr>
     </a:lvl9pPr>
   </p:defaultTextStyle>
+  <p:extLst>
+    <p:ext uri="{EFAFB233-063F-42B5-8137-9DF3F51BA10A}">
+      <p15:sldGuideLst xmlns:p15="http://schemas.microsoft.com/office/powerpoint/2012/main">
+        <p15:guide id="1" orient="horz" pos="2160">
+          <p15:clr>
+            <a:srgbClr val="A4A3A4"/>
+          </p15:clr>
+        </p15:guide>
+        <p15:guide id="2" pos="2880">
+          <p15:clr>
+            <a:srgbClr val="A4A3A4"/>
+          </p15:clr>
+        </p15:guide>
+      </p15:sldGuideLst>
+    </p:ext>
+  </p:extLst>
 </p:presentation>
 </file>
 
@@ -156,10 +172,9 @@
           <a:lstStyle/>
           <a:p>
             <a:r>
-              <a:rPr lang="en-US" smtClean="0"/>
+              <a:rPr lang="en-US"/>
               <a:t>Click to edit Master title style</a:t>
             </a:r>
-            <a:endParaRPr lang="en-US"/>
           </a:p>
         </p:txBody>
       </p:sp>
@@ -275,10 +290,9 @@
           </a:lstStyle>
           <a:p>
             <a:r>
-              <a:rPr lang="en-US" smtClean="0"/>
+              <a:rPr lang="en-US"/>
               <a:t>Click to edit Master subtitle style</a:t>
             </a:r>
-            <a:endParaRPr lang="en-US"/>
           </a:p>
         </p:txBody>
       </p:sp>
@@ -299,7 +313,7 @@
           <a:p>
             <a:fld id="{5BCAD085-E8A6-8845-BD4E-CB4CCA059FC4}" type="datetimeFigureOut">
               <a:rPr lang="en-US" smtClean="0"/>
-              <a:t>1/27/13</a:t>
+              <a:t>3/29/2026</a:t>
             </a:fld>
             <a:endParaRPr lang="en-US"/>
           </a:p>
@@ -393,10 +407,9 @@
           <a:lstStyle/>
           <a:p>
             <a:r>
-              <a:rPr lang="en-US" smtClean="0"/>
+              <a:rPr lang="en-US"/>
               <a:t>Click to edit Master title style</a:t>
             </a:r>
-            <a:endParaRPr lang="en-US"/>
           </a:p>
         </p:txBody>
       </p:sp>
@@ -417,38 +430,37 @@
           <a:p>
             <a:pPr lvl="0"/>
             <a:r>
-              <a:rPr lang="en-US" smtClean="0"/>
+              <a:rPr lang="en-US"/>
               <a:t>Click to edit Master text styles</a:t>
             </a:r>
           </a:p>
           <a:p>
             <a:pPr lvl="1"/>
             <a:r>
-              <a:rPr lang="en-US" smtClean="0"/>
+              <a:rPr lang="en-US"/>
               <a:t>Second level</a:t>
             </a:r>
           </a:p>
           <a:p>
             <a:pPr lvl="2"/>
             <a:r>
-              <a:rPr lang="en-US" smtClean="0"/>
+              <a:rPr lang="en-US"/>
               <a:t>Third level</a:t>
             </a:r>
           </a:p>
           <a:p>
             <a:pPr lvl="3"/>
             <a:r>
-              <a:rPr lang="en-US" smtClean="0"/>
+              <a:rPr lang="en-US"/>
               <a:t>Fourth level</a:t>
             </a:r>
           </a:p>
           <a:p>
             <a:pPr lvl="4"/>
             <a:r>
-              <a:rPr lang="en-US" smtClean="0"/>
+              <a:rPr lang="en-US"/>
               <a:t>Fifth level</a:t>
             </a:r>
-            <a:endParaRPr lang="en-US"/>
           </a:p>
         </p:txBody>
       </p:sp>
@@ -469,7 +481,7 @@
           <a:p>
             <a:fld id="{5BCAD085-E8A6-8845-BD4E-CB4CCA059FC4}" type="datetimeFigureOut">
               <a:rPr lang="en-US" smtClean="0"/>
-              <a:t>1/27/13</a:t>
+              <a:t>3/29/2026</a:t>
             </a:fld>
             <a:endParaRPr lang="en-US"/>
           </a:p>
@@ -568,10 +580,9 @@
           <a:lstStyle/>
           <a:p>
             <a:r>
-              <a:rPr lang="en-US" smtClean="0"/>
+              <a:rPr lang="en-US"/>
               <a:t>Click to edit Master title style</a:t>
             </a:r>
-            <a:endParaRPr lang="en-US"/>
           </a:p>
         </p:txBody>
       </p:sp>
@@ -597,38 +608,37 @@
           <a:p>
             <a:pPr lvl="0"/>
             <a:r>
-              <a:rPr lang="en-US" smtClean="0"/>
+              <a:rPr lang="en-US"/>
               <a:t>Click to edit Master text styles</a:t>
             </a:r>
           </a:p>
           <a:p>
             <a:pPr lvl="1"/>
             <a:r>
-              <a:rPr lang="en-US" smtClean="0"/>
+              <a:rPr lang="en-US"/>
               <a:t>Second level</a:t>
             </a:r>
           </a:p>
           <a:p>
             <a:pPr lvl="2"/>
             <a:r>
-              <a:rPr lang="en-US" smtClean="0"/>
+              <a:rPr lang="en-US"/>
               <a:t>Third level</a:t>
             </a:r>
           </a:p>
           <a:p>
             <a:pPr lvl="3"/>
             <a:r>
-              <a:rPr lang="en-US" smtClean="0"/>
+              <a:rPr lang="en-US"/>
               <a:t>Fourth level</a:t>
             </a:r>
           </a:p>
           <a:p>
             <a:pPr lvl="4"/>
             <a:r>
-              <a:rPr lang="en-US" smtClean="0"/>
+              <a:rPr lang="en-US"/>
               <a:t>Fifth level</a:t>
             </a:r>
-            <a:endParaRPr lang="en-US"/>
           </a:p>
         </p:txBody>
       </p:sp>
@@ -649,7 +659,7 @@
           <a:p>
             <a:fld id="{5BCAD085-E8A6-8845-BD4E-CB4CCA059FC4}" type="datetimeFigureOut">
               <a:rPr lang="en-US" smtClean="0"/>
-              <a:t>1/27/13</a:t>
+              <a:t>3/29/2026</a:t>
             </a:fld>
             <a:endParaRPr lang="en-US"/>
           </a:p>
@@ -743,10 +753,9 @@
           <a:lstStyle/>
           <a:p>
             <a:r>
-              <a:rPr lang="en-US" smtClean="0"/>
+              <a:rPr lang="en-US"/>
               <a:t>Click to edit Master title style</a:t>
             </a:r>
-            <a:endParaRPr lang="en-US"/>
           </a:p>
         </p:txBody>
       </p:sp>
@@ -767,38 +776,37 @@
           <a:p>
             <a:pPr lvl="0"/>
             <a:r>
-              <a:rPr lang="en-US" smtClean="0"/>
+              <a:rPr lang="en-US"/>
               <a:t>Click to edit Master text styles</a:t>
             </a:r>
           </a:p>
           <a:p>
             <a:pPr lvl="1"/>
             <a:r>
-              <a:rPr lang="en-US" smtClean="0"/>
+              <a:rPr lang="en-US"/>
               <a:t>Second level</a:t>
             </a:r>
           </a:p>
           <a:p>
             <a:pPr lvl="2"/>
             <a:r>
-              <a:rPr lang="en-US" smtClean="0"/>
+              <a:rPr lang="en-US"/>
               <a:t>Third level</a:t>
             </a:r>
           </a:p>
           <a:p>
             <a:pPr lvl="3"/>
             <a:r>
-              <a:rPr lang="en-US" smtClean="0"/>
+              <a:rPr lang="en-US"/>
               <a:t>Fourth level</a:t>
             </a:r>
           </a:p>
           <a:p>
             <a:pPr lvl="4"/>
             <a:r>
-              <a:rPr lang="en-US" smtClean="0"/>
+              <a:rPr lang="en-US"/>
               <a:t>Fifth level</a:t>
             </a:r>
-            <a:endParaRPr lang="en-US"/>
           </a:p>
         </p:txBody>
       </p:sp>
@@ -819,7 +827,7 @@
           <a:p>
             <a:fld id="{5BCAD085-E8A6-8845-BD4E-CB4CCA059FC4}" type="datetimeFigureOut">
               <a:rPr lang="en-US" smtClean="0"/>
-              <a:t>1/27/13</a:t>
+              <a:t>3/29/2026</a:t>
             </a:fld>
             <a:endParaRPr lang="en-US"/>
           </a:p>
@@ -922,10 +930,9 @@
           </a:lstStyle>
           <a:p>
             <a:r>
-              <a:rPr lang="en-US" smtClean="0"/>
+              <a:rPr lang="en-US"/>
               <a:t>Click to edit Master title style</a:t>
             </a:r>
-            <a:endParaRPr lang="en-US"/>
           </a:p>
         </p:txBody>
       </p:sp>
@@ -1042,7 +1049,7 @@
           <a:p>
             <a:pPr lvl="0"/>
             <a:r>
-              <a:rPr lang="en-US" smtClean="0"/>
+              <a:rPr lang="en-US"/>
               <a:t>Click to edit Master text styles</a:t>
             </a:r>
           </a:p>
@@ -1065,7 +1072,7 @@
           <a:p>
             <a:fld id="{5BCAD085-E8A6-8845-BD4E-CB4CCA059FC4}" type="datetimeFigureOut">
               <a:rPr lang="en-US" smtClean="0"/>
-              <a:t>1/27/13</a:t>
+              <a:t>3/29/2026</a:t>
             </a:fld>
             <a:endParaRPr lang="en-US"/>
           </a:p>
@@ -1159,10 +1166,9 @@
           <a:lstStyle/>
           <a:p>
             <a:r>
-              <a:rPr lang="en-US" smtClean="0"/>
+              <a:rPr lang="en-US"/>
               <a:t>Click to edit Master title style</a:t>
             </a:r>
-            <a:endParaRPr lang="en-US"/>
           </a:p>
         </p:txBody>
       </p:sp>
@@ -1216,38 +1222,37 @@
           <a:p>
             <a:pPr lvl="0"/>
             <a:r>
-              <a:rPr lang="en-US" smtClean="0"/>
+              <a:rPr lang="en-US"/>
               <a:t>Click to edit Master text styles</a:t>
             </a:r>
           </a:p>
           <a:p>
             <a:pPr lvl="1"/>
             <a:r>
-              <a:rPr lang="en-US" smtClean="0"/>
+              <a:rPr lang="en-US"/>
               <a:t>Second level</a:t>
             </a:r>
           </a:p>
           <a:p>
             <a:pPr lvl="2"/>
             <a:r>
-              <a:rPr lang="en-US" smtClean="0"/>
+              <a:rPr lang="en-US"/>
               <a:t>Third level</a:t>
             </a:r>
           </a:p>
           <a:p>
             <a:pPr lvl="3"/>
             <a:r>
-              <a:rPr lang="en-US" smtClean="0"/>
+              <a:rPr lang="en-US"/>
               <a:t>Fourth level</a:t>
             </a:r>
           </a:p>
           <a:p>
             <a:pPr lvl="4"/>
             <a:r>
-              <a:rPr lang="en-US" smtClean="0"/>
+              <a:rPr lang="en-US"/>
               <a:t>Fifth level</a:t>
             </a:r>
-            <a:endParaRPr lang="en-US"/>
           </a:p>
         </p:txBody>
       </p:sp>
@@ -1301,38 +1306,37 @@
           <a:p>
             <a:pPr lvl="0"/>
             <a:r>
-              <a:rPr lang="en-US" smtClean="0"/>
+              <a:rPr lang="en-US"/>
               <a:t>Click to edit Master text styles</a:t>
             </a:r>
           </a:p>
           <a:p>
             <a:pPr lvl="1"/>
             <a:r>
-              <a:rPr lang="en-US" smtClean="0"/>
+              <a:rPr lang="en-US"/>
               <a:t>Second level</a:t>
             </a:r>
           </a:p>
           <a:p>
             <a:pPr lvl="2"/>
             <a:r>
-              <a:rPr lang="en-US" smtClean="0"/>
+              <a:rPr lang="en-US"/>
               <a:t>Third level</a:t>
             </a:r>
           </a:p>
           <a:p>
             <a:pPr lvl="3"/>
             <a:r>
-              <a:rPr lang="en-US" smtClean="0"/>
+              <a:rPr lang="en-US"/>
               <a:t>Fourth level</a:t>
             </a:r>
           </a:p>
           <a:p>
             <a:pPr lvl="4"/>
             <a:r>
-              <a:rPr lang="en-US" smtClean="0"/>
+              <a:rPr lang="en-US"/>
               <a:t>Fifth level</a:t>
             </a:r>
-            <a:endParaRPr lang="en-US"/>
           </a:p>
         </p:txBody>
       </p:sp>
@@ -1353,7 +1357,7 @@
           <a:p>
             <a:fld id="{5BCAD085-E8A6-8845-BD4E-CB4CCA059FC4}" type="datetimeFigureOut">
               <a:rPr lang="en-US" smtClean="0"/>
-              <a:t>1/27/13</a:t>
+              <a:t>3/29/2026</a:t>
             </a:fld>
             <a:endParaRPr lang="en-US"/>
           </a:p>
@@ -1451,10 +1455,9 @@
           </a:lstStyle>
           <a:p>
             <a:r>
-              <a:rPr lang="en-US" smtClean="0"/>
+              <a:rPr lang="en-US"/>
               <a:t>Click to edit Master title style</a:t>
             </a:r>
-            <a:endParaRPr lang="en-US"/>
           </a:p>
         </p:txBody>
       </p:sp>
@@ -1517,7 +1520,7 @@
           <a:p>
             <a:pPr lvl="0"/>
             <a:r>
-              <a:rPr lang="en-US" smtClean="0"/>
+              <a:rPr lang="en-US"/>
               <a:t>Click to edit Master text styles</a:t>
             </a:r>
           </a:p>
@@ -1573,38 +1576,37 @@
           <a:p>
             <a:pPr lvl="0"/>
             <a:r>
-              <a:rPr lang="en-US" smtClean="0"/>
+              <a:rPr lang="en-US"/>
               <a:t>Click to edit Master text styles</a:t>
             </a:r>
           </a:p>
           <a:p>
             <a:pPr lvl="1"/>
             <a:r>
-              <a:rPr lang="en-US" smtClean="0"/>
+              <a:rPr lang="en-US"/>
               <a:t>Second level</a:t>
             </a:r>
           </a:p>
           <a:p>
             <a:pPr lvl="2"/>
             <a:r>
-              <a:rPr lang="en-US" smtClean="0"/>
+              <a:rPr lang="en-US"/>
               <a:t>Third level</a:t>
             </a:r>
           </a:p>
           <a:p>
             <a:pPr lvl="3"/>
             <a:r>
-              <a:rPr lang="en-US" smtClean="0"/>
+              <a:rPr lang="en-US"/>
               <a:t>Fourth level</a:t>
             </a:r>
           </a:p>
           <a:p>
             <a:pPr lvl="4"/>
             <a:r>
-              <a:rPr lang="en-US" smtClean="0"/>
+              <a:rPr lang="en-US"/>
               <a:t>Fifth level</a:t>
             </a:r>
-            <a:endParaRPr lang="en-US"/>
           </a:p>
         </p:txBody>
       </p:sp>
@@ -1667,7 +1669,7 @@
           <a:p>
             <a:pPr lvl="0"/>
             <a:r>
-              <a:rPr lang="en-US" smtClean="0"/>
+              <a:rPr lang="en-US"/>
               <a:t>Click to edit Master text styles</a:t>
             </a:r>
           </a:p>
@@ -1723,38 +1725,37 @@
           <a:p>
             <a:pPr lvl="0"/>
             <a:r>
-              <a:rPr lang="en-US" smtClean="0"/>
+              <a:rPr lang="en-US"/>
               <a:t>Click to edit Master text styles</a:t>
             </a:r>
           </a:p>
           <a:p>
             <a:pPr lvl="1"/>
             <a:r>
-              <a:rPr lang="en-US" smtClean="0"/>
+              <a:rPr lang="en-US"/>
               <a:t>Second level</a:t>
             </a:r>
           </a:p>
           <a:p>
             <a:pPr lvl="2"/>
             <a:r>
-              <a:rPr lang="en-US" smtClean="0"/>
+              <a:rPr lang="en-US"/>
               <a:t>Third level</a:t>
             </a:r>
           </a:p>
           <a:p>
             <a:pPr lvl="3"/>
             <a:r>
-              <a:rPr lang="en-US" smtClean="0"/>
+              <a:rPr lang="en-US"/>
               <a:t>Fourth level</a:t>
             </a:r>
           </a:p>
           <a:p>
             <a:pPr lvl="4"/>
             <a:r>
-              <a:rPr lang="en-US" smtClean="0"/>
+              <a:rPr lang="en-US"/>
               <a:t>Fifth level</a:t>
             </a:r>
-            <a:endParaRPr lang="en-US"/>
           </a:p>
         </p:txBody>
       </p:sp>
@@ -1775,7 +1776,7 @@
           <a:p>
             <a:fld id="{5BCAD085-E8A6-8845-BD4E-CB4CCA059FC4}" type="datetimeFigureOut">
               <a:rPr lang="en-US" smtClean="0"/>
-              <a:t>1/27/13</a:t>
+              <a:t>3/29/2026</a:t>
             </a:fld>
             <a:endParaRPr lang="en-US"/>
           </a:p>
@@ -1869,10 +1870,9 @@
           <a:lstStyle/>
           <a:p>
             <a:r>
-              <a:rPr lang="en-US" smtClean="0"/>
+              <a:rPr lang="en-US"/>
               <a:t>Click to edit Master title style</a:t>
             </a:r>
-            <a:endParaRPr lang="en-US"/>
           </a:p>
         </p:txBody>
       </p:sp>
@@ -1893,7 +1893,7 @@
           <a:p>
             <a:fld id="{5BCAD085-E8A6-8845-BD4E-CB4CCA059FC4}" type="datetimeFigureOut">
               <a:rPr lang="en-US" smtClean="0"/>
-              <a:t>1/27/13</a:t>
+              <a:t>3/29/2026</a:t>
             </a:fld>
             <a:endParaRPr lang="en-US"/>
           </a:p>
@@ -1988,7 +1988,7 @@
           <a:p>
             <a:fld id="{5BCAD085-E8A6-8845-BD4E-CB4CCA059FC4}" type="datetimeFigureOut">
               <a:rPr lang="en-US" smtClean="0"/>
-              <a:t>1/27/13</a:t>
+              <a:t>3/29/2026</a:t>
             </a:fld>
             <a:endParaRPr lang="en-US"/>
           </a:p>
@@ -2091,10 +2091,9 @@
           </a:lstStyle>
           <a:p>
             <a:r>
-              <a:rPr lang="en-US" smtClean="0"/>
+              <a:rPr lang="en-US"/>
               <a:t>Click to edit Master title style</a:t>
             </a:r>
-            <a:endParaRPr lang="en-US"/>
           </a:p>
         </p:txBody>
       </p:sp>
@@ -2148,38 +2147,37 @@
           <a:p>
             <a:pPr lvl="0"/>
             <a:r>
-              <a:rPr lang="en-US" smtClean="0"/>
+              <a:rPr lang="en-US"/>
               <a:t>Click to edit Master text styles</a:t>
             </a:r>
           </a:p>
           <a:p>
             <a:pPr lvl="1"/>
             <a:r>
-              <a:rPr lang="en-US" smtClean="0"/>
+              <a:rPr lang="en-US"/>
               <a:t>Second level</a:t>
             </a:r>
           </a:p>
           <a:p>
             <a:pPr lvl="2"/>
             <a:r>
-              <a:rPr lang="en-US" smtClean="0"/>
+              <a:rPr lang="en-US"/>
               <a:t>Third level</a:t>
             </a:r>
           </a:p>
           <a:p>
             <a:pPr lvl="3"/>
             <a:r>
-              <a:rPr lang="en-US" smtClean="0"/>
+              <a:rPr lang="en-US"/>
               <a:t>Fourth level</a:t>
             </a:r>
           </a:p>
           <a:p>
             <a:pPr lvl="4"/>
             <a:r>
-              <a:rPr lang="en-US" smtClean="0"/>
+              <a:rPr lang="en-US"/>
               <a:t>Fifth level</a:t>
             </a:r>
-            <a:endParaRPr lang="en-US"/>
           </a:p>
         </p:txBody>
       </p:sp>
@@ -2242,7 +2240,7 @@
           <a:p>
             <a:pPr lvl="0"/>
             <a:r>
-              <a:rPr lang="en-US" smtClean="0"/>
+              <a:rPr lang="en-US"/>
               <a:t>Click to edit Master text styles</a:t>
             </a:r>
           </a:p>
@@ -2265,7 +2263,7 @@
           <a:p>
             <a:fld id="{5BCAD085-E8A6-8845-BD4E-CB4CCA059FC4}" type="datetimeFigureOut">
               <a:rPr lang="en-US" smtClean="0"/>
-              <a:t>1/27/13</a:t>
+              <a:t>3/29/2026</a:t>
             </a:fld>
             <a:endParaRPr lang="en-US"/>
           </a:p>
@@ -2368,10 +2366,9 @@
           </a:lstStyle>
           <a:p>
             <a:r>
-              <a:rPr lang="en-US" smtClean="0"/>
+              <a:rPr lang="en-US"/>
               <a:t>Click to edit Master title style</a:t>
             </a:r>
-            <a:endParaRPr lang="en-US"/>
           </a:p>
         </p:txBody>
       </p:sp>
@@ -2495,7 +2492,7 @@
           <a:p>
             <a:pPr lvl="0"/>
             <a:r>
-              <a:rPr lang="en-US" smtClean="0"/>
+              <a:rPr lang="en-US"/>
               <a:t>Click to edit Master text styles</a:t>
             </a:r>
           </a:p>
@@ -2518,7 +2515,7 @@
           <a:p>
             <a:fld id="{5BCAD085-E8A6-8845-BD4E-CB4CCA059FC4}" type="datetimeFigureOut">
               <a:rPr lang="en-US" smtClean="0"/>
-              <a:t>1/27/13</a:t>
+              <a:t>3/29/2026</a:t>
             </a:fld>
             <a:endParaRPr lang="en-US"/>
           </a:p>
@@ -2627,10 +2624,9 @@
           <a:lstStyle/>
           <a:p>
             <a:r>
-              <a:rPr lang="en-US" smtClean="0"/>
+              <a:rPr lang="en-US"/>
               <a:t>Click to edit Master title style</a:t>
             </a:r>
-            <a:endParaRPr lang="en-US"/>
           </a:p>
         </p:txBody>
       </p:sp>
@@ -2661,38 +2657,37 @@
           <a:p>
             <a:pPr lvl="0"/>
             <a:r>
-              <a:rPr lang="en-US" smtClean="0"/>
+              <a:rPr lang="en-US"/>
               <a:t>Click to edit Master text styles</a:t>
             </a:r>
           </a:p>
           <a:p>
             <a:pPr lvl="1"/>
             <a:r>
-              <a:rPr lang="en-US" smtClean="0"/>
+              <a:rPr lang="en-US"/>
               <a:t>Second level</a:t>
             </a:r>
           </a:p>
           <a:p>
             <a:pPr lvl="2"/>
             <a:r>
-              <a:rPr lang="en-US" smtClean="0"/>
+              <a:rPr lang="en-US"/>
               <a:t>Third level</a:t>
             </a:r>
           </a:p>
           <a:p>
             <a:pPr lvl="3"/>
             <a:r>
-              <a:rPr lang="en-US" smtClean="0"/>
+              <a:rPr lang="en-US"/>
               <a:t>Fourth level</a:t>
             </a:r>
           </a:p>
           <a:p>
             <a:pPr lvl="4"/>
             <a:r>
-              <a:rPr lang="en-US" smtClean="0"/>
+              <a:rPr lang="en-US"/>
               <a:t>Fifth level</a:t>
             </a:r>
-            <a:endParaRPr lang="en-US"/>
           </a:p>
         </p:txBody>
       </p:sp>
@@ -2731,7 +2726,7 @@
           <a:p>
             <a:fld id="{5BCAD085-E8A6-8845-BD4E-CB4CCA059FC4}" type="datetimeFigureOut">
               <a:rPr lang="en-US" smtClean="0"/>
-              <a:t>1/27/13</a:t>
+              <a:t>3/29/2026</a:t>
             </a:fld>
             <a:endParaRPr lang="en-US"/>
           </a:p>
@@ -3090,7 +3085,7 @@
 </file>
 
 <file path=ppt/slides/slide1.xml><?xml version="1.0" encoding="utf-8"?>
-<p:sld xmlns:a="http://schemas.openxmlformats.org/drawingml/2006/main" xmlns:p="http://schemas.openxmlformats.org/presentationml/2006/main" xmlns:r="http://schemas.openxmlformats.org/officeDocument/2006/relationships">
+<p:sld xmlns:a="http://schemas.openxmlformats.org/drawingml/2006/main" xmlns:r="http://schemas.openxmlformats.org/officeDocument/2006/relationships" xmlns:p="http://schemas.openxmlformats.org/presentationml/2006/main">
   <p:cSld>
     <p:spTree>
       <p:nvGrpSpPr>
@@ -3098,7 +3093,14 @@
         <p:cNvGrpSpPr/>
         <p:nvPr/>
       </p:nvGrpSpPr>
-      <p:grpSpPr/>
+      <p:grpSpPr>
+        <a:xfrm>
+          <a:off x="0" y="0"/>
+          <a:ext cx="0" cy="0"/>
+          <a:chOff x="0" y="0"/>
+          <a:chExt cx="0" cy="0"/>
+        </a:xfrm>
+      </p:grpSpPr>
       <p:sp>
         <p:nvSpPr>
           <p:cNvPr id="2" name="Rectangle 1"/>
@@ -3107,7 +3109,7 @@
         </p:nvSpPr>
         <p:spPr>
           <a:xfrm>
-            <a:off x="0" y="0"/>
+            <a:off x="0" y="15902"/>
             <a:ext cx="12188952" cy="6858000"/>
           </a:xfrm>
           <a:prstGeom prst="rect">
@@ -3139,6 +3141,7 @@
           <a:lstStyle/>
           <a:p>
             <a:pPr algn="ctr"/>
+            <a:endParaRPr/>
           </a:p>
         </p:txBody>
       </p:sp>
@@ -3182,6 +3185,7 @@
           <a:lstStyle/>
           <a:p>
             <a:pPr algn="ctr"/>
+            <a:endParaRPr/>
           </a:p>
         </p:txBody>
       </p:sp>
@@ -3225,6 +3229,7 @@
           <a:lstStyle/>
           <a:p>
             <a:pPr algn="ctr"/>
+            <a:endParaRPr/>
           </a:p>
         </p:txBody>
       </p:sp>
@@ -3268,6 +3273,7 @@
           <a:lstStyle/>
           <a:p>
             <a:pPr algn="ctr"/>
+            <a:endParaRPr/>
           </a:p>
         </p:txBody>
       </p:sp>
@@ -3379,6 +3385,7 @@
           <a:lstStyle/>
           <a:p>
             <a:pPr algn="ctr"/>
+            <a:endParaRPr/>
           </a:p>
         </p:txBody>
       </p:sp>
@@ -3424,7 +3431,7 @@
         </p:nvSpPr>
         <p:spPr>
           <a:xfrm>
-            <a:off x="731520" y="4069080"/>
+            <a:off x="659958" y="3781044"/>
             <a:ext cx="10698480" cy="411480"/>
           </a:xfrm>
           <a:prstGeom prst="rect">
@@ -3440,7 +3447,7 @@
           <a:p>
             <a:pPr algn="ctr"/>
             <a:r>
-              <a:rPr sz="2000" b="1" i="0">
+              <a:rPr sz="2000" b="1" i="0" dirty="0">
                 <a:solidFill>
                   <a:srgbClr val="FFFFFF"/>
                 </a:solidFill>
@@ -3458,7 +3465,7 @@
         </p:nvSpPr>
         <p:spPr>
           <a:xfrm>
-            <a:off x="731520" y="4526280"/>
+            <a:off x="659958" y="4169664"/>
             <a:ext cx="10698480" cy="411480"/>
           </a:xfrm>
           <a:prstGeom prst="rect">
@@ -3474,46 +3481,12 @@
           <a:p>
             <a:pPr algn="ctr"/>
             <a:r>
-              <a:rPr sz="1800" b="0" i="0">
+              <a:rPr sz="1800" b="0" i="0" dirty="0">
                 <a:solidFill>
                   <a:srgbClr val="BBDEFB"/>
                 </a:solidFill>
               </a:rPr>
               <a:t>Under the Guidance of:  Dr. Krishna Kumar</a:t>
-            </a:r>
-          </a:p>
-        </p:txBody>
-      </p:sp>
-      <p:sp>
-        <p:nvSpPr>
-          <p:cNvPr id="12" name="TextBox 11"/>
-          <p:cNvSpPr txBox="1"/>
-          <p:nvPr/>
-        </p:nvSpPr>
-        <p:spPr>
-          <a:xfrm>
-            <a:off x="731520" y="6291072"/>
-            <a:ext cx="10698480" cy="320040"/>
-          </a:xfrm>
-          <a:prstGeom prst="rect">
-            <a:avLst/>
-          </a:prstGeom>
-          <a:noFill/>
-        </p:spPr>
-        <p:txBody>
-          <a:bodyPr wrap="square">
-            <a:spAutoFit/>
-          </a:bodyPr>
-          <a:lstStyle/>
-          <a:p>
-            <a:pPr algn="ctr"/>
-            <a:r>
-              <a:rPr sz="1300" b="0" i="0">
-                <a:solidFill>
-                  <a:srgbClr val="789ABF"/>
-                </a:solidFill>
-              </a:rPr>
-              <a:t>Computer Science &amp; Engineering  |  2024–25</a:t>
             </a:r>
           </a:p>
         </p:txBody>
@@ -3527,7 +3500,7 @@
 </file>
 
 <file path=ppt/slides/slide10.xml><?xml version="1.0" encoding="utf-8"?>
-<p:sld xmlns:a="http://schemas.openxmlformats.org/drawingml/2006/main" xmlns:p="http://schemas.openxmlformats.org/presentationml/2006/main" xmlns:r="http://schemas.openxmlformats.org/officeDocument/2006/relationships">
+<p:sld xmlns:a="http://schemas.openxmlformats.org/drawingml/2006/main" xmlns:r="http://schemas.openxmlformats.org/officeDocument/2006/relationships" xmlns:p="http://schemas.openxmlformats.org/presentationml/2006/main">
   <p:cSld>
     <p:spTree>
       <p:nvGrpSpPr>
@@ -3535,7 +3508,14 @@
         <p:cNvGrpSpPr/>
         <p:nvPr/>
       </p:nvGrpSpPr>
-      <p:grpSpPr/>
+      <p:grpSpPr>
+        <a:xfrm>
+          <a:off x="0" y="0"/>
+          <a:ext cx="0" cy="0"/>
+          <a:chOff x="0" y="0"/>
+          <a:chExt cx="0" cy="0"/>
+        </a:xfrm>
+      </p:grpSpPr>
       <p:sp>
         <p:nvSpPr>
           <p:cNvPr id="2" name="Rectangle 1"/>
@@ -3576,6 +3556,7 @@
           <a:lstStyle/>
           <a:p>
             <a:pPr algn="ctr"/>
+            <a:endParaRPr/>
           </a:p>
         </p:txBody>
       </p:sp>
@@ -3619,6 +3600,7 @@
           <a:lstStyle/>
           <a:p>
             <a:pPr algn="ctr"/>
+            <a:endParaRPr/>
           </a:p>
         </p:txBody>
       </p:sp>
@@ -3730,6 +3712,7 @@
           <a:lstStyle/>
           <a:p>
             <a:pPr algn="ctr"/>
+            <a:endParaRPr/>
           </a:p>
         </p:txBody>
       </p:sp>
@@ -3773,6 +3756,7 @@
           <a:lstStyle/>
           <a:p>
             <a:pPr algn="ctr"/>
+            <a:endParaRPr/>
           </a:p>
         </p:txBody>
       </p:sp>
@@ -3785,7 +3769,7 @@
         <p:spPr>
           <a:xfrm>
             <a:off x="274320" y="6574536"/>
-            <a:ext cx="11612880" cy="256032"/>
+            <a:ext cx="11612880" cy="261610"/>
           </a:xfrm>
           <a:prstGeom prst="rect">
             <a:avLst/>
@@ -3800,12 +3784,12 @@
           <a:p>
             <a:pPr algn="ctr"/>
             <a:r>
-              <a:rPr sz="1100" b="0" i="0">
+              <a:rPr sz="1100" b="0" i="0" dirty="0">
                 <a:solidFill>
                   <a:srgbClr val="BBDEFB"/>
                 </a:solidFill>
               </a:rPr>
-              <a:t>Smart Healthcare Appointment System  |  Mannat Vij</a:t>
+              <a:t>Smart Healthcare Appointment System  </a:t>
             </a:r>
           </a:p>
         </p:txBody>
@@ -3852,6 +3836,7 @@
           <a:lstStyle/>
           <a:p>
             <a:pPr algn="ctr"/>
+            <a:endParaRPr/>
           </a:p>
         </p:txBody>
       </p:sp>
@@ -3919,6 +3904,7 @@
           <a:lstStyle/>
           <a:p>
             <a:pPr algn="ctr"/>
+            <a:endParaRPr/>
           </a:p>
         </p:txBody>
       </p:sp>
@@ -3998,6 +3984,7 @@
           <a:lstStyle/>
           <a:p>
             <a:pPr algn="ctr"/>
+            <a:endParaRPr/>
           </a:p>
         </p:txBody>
       </p:sp>
@@ -4065,6 +4052,7 @@
           <a:lstStyle/>
           <a:p>
             <a:pPr algn="ctr"/>
+            <a:endParaRPr/>
           </a:p>
         </p:txBody>
       </p:sp>
@@ -4111,7 +4099,7 @@
 </file>
 
 <file path=ppt/slides/slide11.xml><?xml version="1.0" encoding="utf-8"?>
-<p:sld xmlns:a="http://schemas.openxmlformats.org/drawingml/2006/main" xmlns:p="http://schemas.openxmlformats.org/presentationml/2006/main" xmlns:r="http://schemas.openxmlformats.org/officeDocument/2006/relationships">
+<p:sld xmlns:a="http://schemas.openxmlformats.org/drawingml/2006/main" xmlns:r="http://schemas.openxmlformats.org/officeDocument/2006/relationships" xmlns:p="http://schemas.openxmlformats.org/presentationml/2006/main">
   <p:cSld>
     <p:spTree>
       <p:nvGrpSpPr>
@@ -4119,7 +4107,14 @@
         <p:cNvGrpSpPr/>
         <p:nvPr/>
       </p:nvGrpSpPr>
-      <p:grpSpPr/>
+      <p:grpSpPr>
+        <a:xfrm>
+          <a:off x="0" y="0"/>
+          <a:ext cx="0" cy="0"/>
+          <a:chOff x="0" y="0"/>
+          <a:chExt cx="0" cy="0"/>
+        </a:xfrm>
+      </p:grpSpPr>
       <p:sp>
         <p:nvSpPr>
           <p:cNvPr id="2" name="Rectangle 1"/>
@@ -4160,6 +4155,7 @@
           <a:lstStyle/>
           <a:p>
             <a:pPr algn="ctr"/>
+            <a:endParaRPr/>
           </a:p>
         </p:txBody>
       </p:sp>
@@ -4203,6 +4199,7 @@
           <a:lstStyle/>
           <a:p>
             <a:pPr algn="ctr"/>
+            <a:endParaRPr/>
           </a:p>
         </p:txBody>
       </p:sp>
@@ -4314,6 +4311,7 @@
           <a:lstStyle/>
           <a:p>
             <a:pPr algn="ctr"/>
+            <a:endParaRPr/>
           </a:p>
         </p:txBody>
       </p:sp>
@@ -4357,6 +4355,7 @@
           <a:lstStyle/>
           <a:p>
             <a:pPr algn="ctr"/>
+            <a:endParaRPr/>
           </a:p>
         </p:txBody>
       </p:sp>
@@ -4369,7 +4368,7 @@
         <p:spPr>
           <a:xfrm>
             <a:off x="274320" y="6574536"/>
-            <a:ext cx="11612880" cy="256032"/>
+            <a:ext cx="11612880" cy="261610"/>
           </a:xfrm>
           <a:prstGeom prst="rect">
             <a:avLst/>
@@ -4384,12 +4383,12 @@
           <a:p>
             <a:pPr algn="ctr"/>
             <a:r>
-              <a:rPr sz="1100" b="0" i="0">
+              <a:rPr sz="1100" b="0" i="0" dirty="0">
                 <a:solidFill>
                   <a:srgbClr val="BBDEFB"/>
                 </a:solidFill>
               </a:rPr>
-              <a:t>Smart Healthcare Appointment System  |  Mannat Vij</a:t>
+              <a:t>Smart Healthcare Appointment System  </a:t>
             </a:r>
           </a:p>
         </p:txBody>
@@ -4436,6 +4435,7 @@
           <a:lstStyle/>
           <a:p>
             <a:pPr algn="ctr"/>
+            <a:endParaRPr/>
           </a:p>
         </p:txBody>
       </p:sp>
@@ -4479,6 +4479,7 @@
           <a:lstStyle/>
           <a:p>
             <a:pPr algn="ctr"/>
+            <a:endParaRPr/>
           </a:p>
         </p:txBody>
       </p:sp>
@@ -4592,6 +4593,7 @@
           <a:lstStyle/>
           <a:p>
             <a:pPr algn="ctr"/>
+            <a:endParaRPr/>
           </a:p>
         </p:txBody>
       </p:sp>
@@ -4635,6 +4637,7 @@
           <a:lstStyle/>
           <a:p>
             <a:pPr algn="ctr"/>
+            <a:endParaRPr/>
           </a:p>
         </p:txBody>
       </p:sp>
@@ -4748,6 +4751,7 @@
           <a:lstStyle/>
           <a:p>
             <a:pPr algn="ctr"/>
+            <a:endParaRPr/>
           </a:p>
         </p:txBody>
       </p:sp>
@@ -4791,6 +4795,7 @@
           <a:lstStyle/>
           <a:p>
             <a:pPr algn="ctr"/>
+            <a:endParaRPr/>
           </a:p>
         </p:txBody>
       </p:sp>
@@ -4864,13 +4869,13 @@
       </p:sp>
       <p:sp>
         <p:nvSpPr>
-          <p:cNvPr id="21" name="Rectangle 20"/>
+          <p:cNvPr id="25" name="Rectangle 24"/>
           <p:cNvSpPr/>
           <p:nvPr/>
         </p:nvSpPr>
         <p:spPr>
           <a:xfrm>
-            <a:off x="411480" y="5367528"/>
+            <a:off x="6400800" y="1417320"/>
             <a:ext cx="5486400" cy="1188720"/>
           </a:xfrm>
           <a:prstGeom prst="rect">
@@ -4904,18 +4909,19 @@
           <a:lstStyle/>
           <a:p>
             <a:pPr algn="ctr"/>
-          </a:p>
-        </p:txBody>
-      </p:sp>
-      <p:sp>
-        <p:nvSpPr>
-          <p:cNvPr id="22" name="Rectangle 21"/>
+            <a:endParaRPr/>
+          </a:p>
+        </p:txBody>
+      </p:sp>
+      <p:sp>
+        <p:nvSpPr>
+          <p:cNvPr id="26" name="Rectangle 25"/>
           <p:cNvSpPr/>
           <p:nvPr/>
         </p:nvSpPr>
         <p:spPr>
           <a:xfrm>
-            <a:off x="411480" y="5367528"/>
+            <a:off x="6400800" y="1417320"/>
             <a:ext cx="137160" cy="1188720"/>
           </a:xfrm>
           <a:prstGeom prst="rect">
@@ -4947,18 +4953,19 @@
           <a:lstStyle/>
           <a:p>
             <a:pPr algn="ctr"/>
-          </a:p>
-        </p:txBody>
-      </p:sp>
-      <p:sp>
-        <p:nvSpPr>
-          <p:cNvPr id="23" name="TextBox 22"/>
+            <a:endParaRPr/>
+          </a:p>
+        </p:txBody>
+      </p:sp>
+      <p:sp>
+        <p:nvSpPr>
+          <p:cNvPr id="27" name="TextBox 26"/>
           <p:cNvSpPr txBox="1"/>
           <p:nvPr/>
         </p:nvSpPr>
         <p:spPr>
           <a:xfrm>
-            <a:off x="667512" y="5440680"/>
+            <a:off x="6656832" y="1490472"/>
             <a:ext cx="5166360" cy="347472"/>
           </a:xfrm>
           <a:prstGeom prst="rect">
@@ -4979,20 +4986,20 @@
                   <a:srgbClr val="0D2C54"/>
                 </a:solidFill>
               </a:rPr>
-              <a:t>Online Payment Gateway</a:t>
-            </a:r>
-          </a:p>
-        </p:txBody>
-      </p:sp>
-      <p:sp>
-        <p:nvSpPr>
-          <p:cNvPr id="24" name="TextBox 23"/>
+              <a:t>Video Consultation (WebRTC)</a:t>
+            </a:r>
+          </a:p>
+        </p:txBody>
+      </p:sp>
+      <p:sp>
+        <p:nvSpPr>
+          <p:cNvPr id="28" name="TextBox 27"/>
           <p:cNvSpPr txBox="1"/>
           <p:nvPr/>
         </p:nvSpPr>
         <p:spPr>
           <a:xfrm>
-            <a:off x="667512" y="5806440"/>
+            <a:off x="6656832" y="1856232"/>
             <a:ext cx="5166360" cy="658368"/>
           </a:xfrm>
           <a:prstGeom prst="rect">
@@ -5008,25 +5015,25 @@
           <a:p>
             <a:pPr algn="l"/>
             <a:r>
-              <a:rPr sz="1250" b="0" i="0">
+              <a:rPr sz="1250" b="0" i="0" dirty="0">
                 <a:solidFill>
                   <a:srgbClr val="555566"/>
                 </a:solidFill>
               </a:rPr>
-              <a:t>Razorpay / Stripe integration for secure online consultation fee collection before appointments.</a:t>
-            </a:r>
-          </a:p>
-        </p:txBody>
-      </p:sp>
-      <p:sp>
-        <p:nvSpPr>
-          <p:cNvPr id="25" name="Rectangle 24"/>
+              <a:t>Built-in virtual appointment feature for remote consultations without leaving the platform.</a:t>
+            </a:r>
+          </a:p>
+        </p:txBody>
+      </p:sp>
+      <p:sp>
+        <p:nvSpPr>
+          <p:cNvPr id="29" name="Rectangle 28"/>
           <p:cNvSpPr/>
           <p:nvPr/>
         </p:nvSpPr>
         <p:spPr>
           <a:xfrm>
-            <a:off x="6400800" y="1417320"/>
+            <a:off x="6400800" y="2734056"/>
             <a:ext cx="5486400" cy="1188720"/>
           </a:xfrm>
           <a:prstGeom prst="rect">
@@ -5060,18 +5067,19 @@
           <a:lstStyle/>
           <a:p>
             <a:pPr algn="ctr"/>
-          </a:p>
-        </p:txBody>
-      </p:sp>
-      <p:sp>
-        <p:nvSpPr>
-          <p:cNvPr id="26" name="Rectangle 25"/>
+            <a:endParaRPr/>
+          </a:p>
+        </p:txBody>
+      </p:sp>
+      <p:sp>
+        <p:nvSpPr>
+          <p:cNvPr id="30" name="Rectangle 29"/>
           <p:cNvSpPr/>
           <p:nvPr/>
         </p:nvSpPr>
         <p:spPr>
           <a:xfrm>
-            <a:off x="6400800" y="1417320"/>
+            <a:off x="6400800" y="2734056"/>
             <a:ext cx="137160" cy="1188720"/>
           </a:xfrm>
           <a:prstGeom prst="rect">
@@ -5103,18 +5111,19 @@
           <a:lstStyle/>
           <a:p>
             <a:pPr algn="ctr"/>
-          </a:p>
-        </p:txBody>
-      </p:sp>
-      <p:sp>
-        <p:nvSpPr>
-          <p:cNvPr id="27" name="TextBox 26"/>
+            <a:endParaRPr/>
+          </a:p>
+        </p:txBody>
+      </p:sp>
+      <p:sp>
+        <p:nvSpPr>
+          <p:cNvPr id="31" name="TextBox 30"/>
           <p:cNvSpPr txBox="1"/>
           <p:nvPr/>
         </p:nvSpPr>
         <p:spPr>
           <a:xfrm>
-            <a:off x="6656832" y="1490472"/>
+            <a:off x="6656832" y="2807208"/>
             <a:ext cx="5166360" cy="347472"/>
           </a:xfrm>
           <a:prstGeom prst="rect">
@@ -5130,25 +5139,25 @@
           <a:p>
             <a:pPr algn="l"/>
             <a:r>
-              <a:rPr sz="1500" b="1" i="0">
+              <a:rPr sz="1500" b="1" i="0" dirty="0">
                 <a:solidFill>
                   <a:srgbClr val="0D2C54"/>
                 </a:solidFill>
               </a:rPr>
-              <a:t>Video Consultation (WebRTC)</a:t>
-            </a:r>
-          </a:p>
-        </p:txBody>
-      </p:sp>
-      <p:sp>
-        <p:nvSpPr>
-          <p:cNvPr id="28" name="TextBox 27"/>
+              <a:t>Calendar Sync &amp; Reminders</a:t>
+            </a:r>
+          </a:p>
+        </p:txBody>
+      </p:sp>
+      <p:sp>
+        <p:nvSpPr>
+          <p:cNvPr id="32" name="TextBox 31"/>
           <p:cNvSpPr txBox="1"/>
           <p:nvPr/>
         </p:nvSpPr>
         <p:spPr>
           <a:xfrm>
-            <a:off x="6656832" y="1856232"/>
+            <a:off x="6656832" y="3172968"/>
             <a:ext cx="5166360" cy="658368"/>
           </a:xfrm>
           <a:prstGeom prst="rect">
@@ -5169,20 +5178,20 @@
                   <a:srgbClr val="555566"/>
                 </a:solidFill>
               </a:rPr>
-              <a:t>Built-in virtual appointment feature for remote consultations without leaving the platform.</a:t>
-            </a:r>
-          </a:p>
-        </p:txBody>
-      </p:sp>
-      <p:sp>
-        <p:nvSpPr>
-          <p:cNvPr id="29" name="Rectangle 28"/>
+              <a:t>Google Calendar / iCal export so patients and doctors receive appointment reminders on their devices.</a:t>
+            </a:r>
+          </a:p>
+        </p:txBody>
+      </p:sp>
+      <p:sp>
+        <p:nvSpPr>
+          <p:cNvPr id="33" name="Rectangle 32"/>
           <p:cNvSpPr/>
           <p:nvPr/>
         </p:nvSpPr>
         <p:spPr>
           <a:xfrm>
-            <a:off x="6400800" y="2734056"/>
+            <a:off x="6400800" y="4050791"/>
             <a:ext cx="5486400" cy="1188720"/>
           </a:xfrm>
           <a:prstGeom prst="rect">
@@ -5216,18 +5225,19 @@
           <a:lstStyle/>
           <a:p>
             <a:pPr algn="ctr"/>
-          </a:p>
-        </p:txBody>
-      </p:sp>
-      <p:sp>
-        <p:nvSpPr>
-          <p:cNvPr id="30" name="Rectangle 29"/>
+            <a:endParaRPr/>
+          </a:p>
+        </p:txBody>
+      </p:sp>
+      <p:sp>
+        <p:nvSpPr>
+          <p:cNvPr id="34" name="Rectangle 33"/>
           <p:cNvSpPr/>
           <p:nvPr/>
         </p:nvSpPr>
         <p:spPr>
           <a:xfrm>
-            <a:off x="6400800" y="2734056"/>
+            <a:off x="6400800" y="4050791"/>
             <a:ext cx="137160" cy="1188720"/>
           </a:xfrm>
           <a:prstGeom prst="rect">
@@ -5259,162 +5269,7 @@
           <a:lstStyle/>
           <a:p>
             <a:pPr algn="ctr"/>
-          </a:p>
-        </p:txBody>
-      </p:sp>
-      <p:sp>
-        <p:nvSpPr>
-          <p:cNvPr id="31" name="TextBox 30"/>
-          <p:cNvSpPr txBox="1"/>
-          <p:nvPr/>
-        </p:nvSpPr>
-        <p:spPr>
-          <a:xfrm>
-            <a:off x="6656832" y="2807208"/>
-            <a:ext cx="5166360" cy="347472"/>
-          </a:xfrm>
-          <a:prstGeom prst="rect">
-            <a:avLst/>
-          </a:prstGeom>
-          <a:noFill/>
-        </p:spPr>
-        <p:txBody>
-          <a:bodyPr wrap="square">
-            <a:spAutoFit/>
-          </a:bodyPr>
-          <a:lstStyle/>
-          <a:p>
-            <a:pPr algn="l"/>
-            <a:r>
-              <a:rPr sz="1500" b="1" i="0">
-                <a:solidFill>
-                  <a:srgbClr val="0D2C54"/>
-                </a:solidFill>
-              </a:rPr>
-              <a:t>Calendar Sync &amp; Reminders</a:t>
-            </a:r>
-          </a:p>
-        </p:txBody>
-      </p:sp>
-      <p:sp>
-        <p:nvSpPr>
-          <p:cNvPr id="32" name="TextBox 31"/>
-          <p:cNvSpPr txBox="1"/>
-          <p:nvPr/>
-        </p:nvSpPr>
-        <p:spPr>
-          <a:xfrm>
-            <a:off x="6656832" y="3172968"/>
-            <a:ext cx="5166360" cy="658368"/>
-          </a:xfrm>
-          <a:prstGeom prst="rect">
-            <a:avLst/>
-          </a:prstGeom>
-          <a:noFill/>
-        </p:spPr>
-        <p:txBody>
-          <a:bodyPr wrap="square">
-            <a:spAutoFit/>
-          </a:bodyPr>
-          <a:lstStyle/>
-          <a:p>
-            <a:pPr algn="l"/>
-            <a:r>
-              <a:rPr sz="1250" b="0" i="0">
-                <a:solidFill>
-                  <a:srgbClr val="555566"/>
-                </a:solidFill>
-              </a:rPr>
-              <a:t>Google Calendar / iCal export so patients and doctors receive appointment reminders on their devices.</a:t>
-            </a:r>
-          </a:p>
-        </p:txBody>
-      </p:sp>
-      <p:sp>
-        <p:nvSpPr>
-          <p:cNvPr id="33" name="Rectangle 32"/>
-          <p:cNvSpPr/>
-          <p:nvPr/>
-        </p:nvSpPr>
-        <p:spPr>
-          <a:xfrm>
-            <a:off x="6400800" y="4050791"/>
-            <a:ext cx="5486400" cy="1188720"/>
-          </a:xfrm>
-          <a:prstGeom prst="rect">
-            <a:avLst/>
-          </a:prstGeom>
-          <a:solidFill>
-            <a:srgbClr val="FFFFFF"/>
-          </a:solidFill>
-          <a:ln w="12700">
-            <a:solidFill>
-              <a:srgbClr val="C5D8F0"/>
-            </a:solidFill>
-          </a:ln>
-        </p:spPr>
-        <p:style>
-          <a:lnRef idx="1">
-            <a:schemeClr val="accent1"/>
-          </a:lnRef>
-          <a:fillRef idx="3">
-            <a:schemeClr val="accent1"/>
-          </a:fillRef>
-          <a:effectRef idx="2">
-            <a:schemeClr val="accent1"/>
-          </a:effectRef>
-          <a:fontRef idx="minor">
-            <a:schemeClr val="lt1"/>
-          </a:fontRef>
-        </p:style>
-        <p:txBody>
-          <a:bodyPr rtlCol="0" anchor="ctr"/>
-          <a:lstStyle/>
-          <a:p>
-            <a:pPr algn="ctr"/>
-          </a:p>
-        </p:txBody>
-      </p:sp>
-      <p:sp>
-        <p:nvSpPr>
-          <p:cNvPr id="34" name="Rectangle 33"/>
-          <p:cNvSpPr/>
-          <p:nvPr/>
-        </p:nvSpPr>
-        <p:spPr>
-          <a:xfrm>
-            <a:off x="6400800" y="4050791"/>
-            <a:ext cx="137160" cy="1188720"/>
-          </a:xfrm>
-          <a:prstGeom prst="rect">
-            <a:avLst/>
-          </a:prstGeom>
-          <a:solidFill>
-            <a:srgbClr val="00B08A"/>
-          </a:solidFill>
-          <a:ln>
-            <a:noFill/>
-          </a:ln>
-        </p:spPr>
-        <p:style>
-          <a:lnRef idx="1">
-            <a:schemeClr val="accent1"/>
-          </a:lnRef>
-          <a:fillRef idx="3">
-            <a:schemeClr val="accent1"/>
-          </a:fillRef>
-          <a:effectRef idx="2">
-            <a:schemeClr val="accent1"/>
-          </a:effectRef>
-          <a:fontRef idx="minor">
-            <a:schemeClr val="lt1"/>
-          </a:fontRef>
-        </p:style>
-        <p:txBody>
-          <a:bodyPr rtlCol="0" anchor="ctr"/>
-          <a:lstStyle/>
-          <a:p>
-            <a:pPr algn="ctr"/>
+            <a:endParaRPr/>
           </a:p>
         </p:txBody>
       </p:sp>
@@ -5495,7 +5350,7 @@
 </file>
 
 <file path=ppt/slides/slide12.xml><?xml version="1.0" encoding="utf-8"?>
-<p:sld xmlns:a="http://schemas.openxmlformats.org/drawingml/2006/main" xmlns:p="http://schemas.openxmlformats.org/presentationml/2006/main" xmlns:r="http://schemas.openxmlformats.org/officeDocument/2006/relationships">
+<p:sld xmlns:a="http://schemas.openxmlformats.org/drawingml/2006/main" xmlns:r="http://schemas.openxmlformats.org/officeDocument/2006/relationships" xmlns:p="http://schemas.openxmlformats.org/presentationml/2006/main">
   <p:cSld>
     <p:spTree>
       <p:nvGrpSpPr>
@@ -5503,7 +5358,14 @@
         <p:cNvGrpSpPr/>
         <p:nvPr/>
       </p:nvGrpSpPr>
-      <p:grpSpPr/>
+      <p:grpSpPr>
+        <a:xfrm>
+          <a:off x="0" y="0"/>
+          <a:ext cx="0" cy="0"/>
+          <a:chOff x="0" y="0"/>
+          <a:chExt cx="0" cy="0"/>
+        </a:xfrm>
+      </p:grpSpPr>
       <p:sp>
         <p:nvSpPr>
           <p:cNvPr id="2" name="Rectangle 1"/>
@@ -5544,6 +5406,7 @@
           <a:lstStyle/>
           <a:p>
             <a:pPr algn="ctr"/>
+            <a:endParaRPr/>
           </a:p>
         </p:txBody>
       </p:sp>
@@ -5587,6 +5450,7 @@
           <a:lstStyle/>
           <a:p>
             <a:pPr algn="ctr"/>
+            <a:endParaRPr/>
           </a:p>
         </p:txBody>
       </p:sp>
@@ -5630,6 +5494,7 @@
           <a:lstStyle/>
           <a:p>
             <a:pPr algn="ctr"/>
+            <a:endParaRPr/>
           </a:p>
         </p:txBody>
       </p:sp>
@@ -5673,6 +5538,7 @@
           <a:lstStyle/>
           <a:p>
             <a:pPr algn="ctr"/>
+            <a:endParaRPr/>
           </a:p>
         </p:txBody>
       </p:sp>
@@ -5750,6 +5616,7 @@
           <a:lstStyle/>
           <a:p>
             <a:pPr algn="ctr"/>
+            <a:endParaRPr/>
           </a:p>
         </p:txBody>
       </p:sp>
@@ -5783,74 +5650,6 @@
                 </a:solidFill>
               </a:rPr>
               <a:t>Smart Healthcare Appointment System</a:t>
-            </a:r>
-          </a:p>
-        </p:txBody>
-      </p:sp>
-      <p:sp>
-        <p:nvSpPr>
-          <p:cNvPr id="9" name="TextBox 8"/>
-          <p:cNvSpPr txBox="1"/>
-          <p:nvPr/>
-        </p:nvSpPr>
-        <p:spPr>
-          <a:xfrm>
-            <a:off x="731520" y="3931920"/>
-            <a:ext cx="10698480" cy="365760"/>
-          </a:xfrm>
-          <a:prstGeom prst="rect">
-            <a:avLst/>
-          </a:prstGeom>
-          <a:noFill/>
-        </p:spPr>
-        <p:txBody>
-          <a:bodyPr wrap="square">
-            <a:spAutoFit/>
-          </a:bodyPr>
-          <a:lstStyle/>
-          <a:p>
-            <a:pPr algn="ctr"/>
-            <a:r>
-              <a:rPr sz="1600" b="0" i="0">
-                <a:solidFill>
-                  <a:srgbClr val="9EC8F0"/>
-                </a:solidFill>
-              </a:rPr>
-              <a:t>Mannat Vij  |  Under the Guidance of Dr. Krishna Kumar</a:t>
-            </a:r>
-          </a:p>
-        </p:txBody>
-      </p:sp>
-      <p:sp>
-        <p:nvSpPr>
-          <p:cNvPr id="10" name="TextBox 9"/>
-          <p:cNvSpPr txBox="1"/>
-          <p:nvPr/>
-        </p:nvSpPr>
-        <p:spPr>
-          <a:xfrm>
-            <a:off x="731520" y="6291072"/>
-            <a:ext cx="10698480" cy="320040"/>
-          </a:xfrm>
-          <a:prstGeom prst="rect">
-            <a:avLst/>
-          </a:prstGeom>
-          <a:noFill/>
-        </p:spPr>
-        <p:txBody>
-          <a:bodyPr wrap="square">
-            <a:spAutoFit/>
-          </a:bodyPr>
-          <a:lstStyle/>
-          <a:p>
-            <a:pPr algn="ctr"/>
-            <a:r>
-              <a:rPr sz="1300" b="0" i="0">
-                <a:solidFill>
-                  <a:srgbClr val="789ABF"/>
-                </a:solidFill>
-              </a:rPr>
-              <a:t>Computer Science &amp; Engineering  |  2024–25</a:t>
             </a:r>
           </a:p>
         </p:txBody>
@@ -5864,7 +5663,7 @@
 </file>
 
 <file path=ppt/slides/slide2.xml><?xml version="1.0" encoding="utf-8"?>
-<p:sld xmlns:a="http://schemas.openxmlformats.org/drawingml/2006/main" xmlns:p="http://schemas.openxmlformats.org/presentationml/2006/main" xmlns:r="http://schemas.openxmlformats.org/officeDocument/2006/relationships">
+<p:sld xmlns:a="http://schemas.openxmlformats.org/drawingml/2006/main" xmlns:r="http://schemas.openxmlformats.org/officeDocument/2006/relationships" xmlns:p="http://schemas.openxmlformats.org/presentationml/2006/main">
   <p:cSld>
     <p:spTree>
       <p:nvGrpSpPr>
@@ -5872,7 +5671,14 @@
         <p:cNvGrpSpPr/>
         <p:nvPr/>
       </p:nvGrpSpPr>
-      <p:grpSpPr/>
+      <p:grpSpPr>
+        <a:xfrm>
+          <a:off x="0" y="0"/>
+          <a:ext cx="0" cy="0"/>
+          <a:chOff x="0" y="0"/>
+          <a:chExt cx="0" cy="0"/>
+        </a:xfrm>
+      </p:grpSpPr>
       <p:sp>
         <p:nvSpPr>
           <p:cNvPr id="2" name="Rectangle 1"/>
@@ -5913,6 +5719,7 @@
           <a:lstStyle/>
           <a:p>
             <a:pPr algn="ctr"/>
+            <a:endParaRPr/>
           </a:p>
         </p:txBody>
       </p:sp>
@@ -5956,6 +5763,7 @@
           <a:lstStyle/>
           <a:p>
             <a:pPr algn="ctr"/>
+            <a:endParaRPr/>
           </a:p>
         </p:txBody>
       </p:sp>
@@ -6067,6 +5875,7 @@
           <a:lstStyle/>
           <a:p>
             <a:pPr algn="ctr"/>
+            <a:endParaRPr/>
           </a:p>
         </p:txBody>
       </p:sp>
@@ -6110,6 +5919,7 @@
           <a:lstStyle/>
           <a:p>
             <a:pPr algn="ctr"/>
+            <a:endParaRPr/>
           </a:p>
         </p:txBody>
       </p:sp>
@@ -6122,7 +5932,7 @@
         <p:spPr>
           <a:xfrm>
             <a:off x="274320" y="6574536"/>
-            <a:ext cx="11612880" cy="256032"/>
+            <a:ext cx="11612880" cy="261610"/>
           </a:xfrm>
           <a:prstGeom prst="rect">
             <a:avLst/>
@@ -6137,12 +5947,12 @@
           <a:p>
             <a:pPr algn="ctr"/>
             <a:r>
-              <a:rPr sz="1100" b="0" i="0">
+              <a:rPr sz="1100" b="0" i="0" dirty="0">
                 <a:solidFill>
                   <a:srgbClr val="BBDEFB"/>
                 </a:solidFill>
               </a:rPr>
-              <a:t>Smart Healthcare Appointment System  |  Mannat Vij</a:t>
+              <a:t>Smart Healthcare Appointment System  </a:t>
             </a:r>
           </a:p>
         </p:txBody>
@@ -6189,6 +5999,7 @@
           <a:lstStyle/>
           <a:p>
             <a:pPr algn="ctr"/>
+            <a:endParaRPr/>
           </a:p>
         </p:txBody>
       </p:sp>
@@ -6232,6 +6043,7 @@
           <a:lstStyle/>
           <a:p>
             <a:pPr algn="ctr"/>
+            <a:endParaRPr/>
           </a:p>
         </p:txBody>
       </p:sp>
@@ -6379,6 +6191,7 @@
           <a:lstStyle/>
           <a:p>
             <a:pPr algn="ctr"/>
+            <a:endParaRPr/>
           </a:p>
         </p:txBody>
       </p:sp>
@@ -6422,6 +6235,7 @@
           <a:lstStyle/>
           <a:p>
             <a:pPr algn="ctr"/>
+            <a:endParaRPr/>
           </a:p>
         </p:txBody>
       </p:sp>
@@ -6569,6 +6383,7 @@
           <a:lstStyle/>
           <a:p>
             <a:pPr algn="ctr"/>
+            <a:endParaRPr/>
           </a:p>
         </p:txBody>
       </p:sp>
@@ -6612,6 +6427,7 @@
           <a:lstStyle/>
           <a:p>
             <a:pPr algn="ctr"/>
+            <a:endParaRPr/>
           </a:p>
         </p:txBody>
       </p:sp>
@@ -6759,6 +6575,7 @@
           <a:lstStyle/>
           <a:p>
             <a:pPr algn="ctr"/>
+            <a:endParaRPr/>
           </a:p>
         </p:txBody>
       </p:sp>
@@ -6802,6 +6619,7 @@
           <a:lstStyle/>
           <a:p>
             <a:pPr algn="ctr"/>
+            <a:endParaRPr/>
           </a:p>
         </p:txBody>
       </p:sp>
@@ -6949,6 +6767,7 @@
           <a:lstStyle/>
           <a:p>
             <a:pPr algn="ctr"/>
+            <a:endParaRPr/>
           </a:p>
         </p:txBody>
       </p:sp>
@@ -6992,6 +6811,7 @@
           <a:lstStyle/>
           <a:p>
             <a:pPr algn="ctr"/>
+            <a:endParaRPr/>
           </a:p>
         </p:txBody>
       </p:sp>
@@ -7139,6 +6959,7 @@
           <a:lstStyle/>
           <a:p>
             <a:pPr algn="ctr"/>
+            <a:endParaRPr/>
           </a:p>
         </p:txBody>
       </p:sp>
@@ -7182,6 +7003,7 @@
           <a:lstStyle/>
           <a:p>
             <a:pPr algn="ctr"/>
+            <a:endParaRPr/>
           </a:p>
         </p:txBody>
       </p:sp>
@@ -7296,7 +7118,7 @@
 </file>
 
 <file path=ppt/slides/slide3.xml><?xml version="1.0" encoding="utf-8"?>
-<p:sld xmlns:a="http://schemas.openxmlformats.org/drawingml/2006/main" xmlns:p="http://schemas.openxmlformats.org/presentationml/2006/main" xmlns:r="http://schemas.openxmlformats.org/officeDocument/2006/relationships">
+<p:sld xmlns:a="http://schemas.openxmlformats.org/drawingml/2006/main" xmlns:r="http://schemas.openxmlformats.org/officeDocument/2006/relationships" xmlns:p="http://schemas.openxmlformats.org/presentationml/2006/main">
   <p:cSld>
     <p:spTree>
       <p:nvGrpSpPr>
@@ -7304,7 +7126,14 @@
         <p:cNvGrpSpPr/>
         <p:nvPr/>
       </p:nvGrpSpPr>
-      <p:grpSpPr/>
+      <p:grpSpPr>
+        <a:xfrm>
+          <a:off x="0" y="0"/>
+          <a:ext cx="0" cy="0"/>
+          <a:chOff x="0" y="0"/>
+          <a:chExt cx="0" cy="0"/>
+        </a:xfrm>
+      </p:grpSpPr>
       <p:sp>
         <p:nvSpPr>
           <p:cNvPr id="2" name="Rectangle 1"/>
@@ -7345,6 +7174,7 @@
           <a:lstStyle/>
           <a:p>
             <a:pPr algn="ctr"/>
+            <a:endParaRPr/>
           </a:p>
         </p:txBody>
       </p:sp>
@@ -7388,6 +7218,7 @@
           <a:lstStyle/>
           <a:p>
             <a:pPr algn="ctr"/>
+            <a:endParaRPr/>
           </a:p>
         </p:txBody>
       </p:sp>
@@ -7499,6 +7330,7 @@
           <a:lstStyle/>
           <a:p>
             <a:pPr algn="ctr"/>
+            <a:endParaRPr/>
           </a:p>
         </p:txBody>
       </p:sp>
@@ -7542,6 +7374,7 @@
           <a:lstStyle/>
           <a:p>
             <a:pPr algn="ctr"/>
+            <a:endParaRPr/>
           </a:p>
         </p:txBody>
       </p:sp>
@@ -7554,7 +7387,7 @@
         <p:spPr>
           <a:xfrm>
             <a:off x="274320" y="6574536"/>
-            <a:ext cx="11612880" cy="256032"/>
+            <a:ext cx="11612880" cy="261610"/>
           </a:xfrm>
           <a:prstGeom prst="rect">
             <a:avLst/>
@@ -7569,12 +7402,12 @@
           <a:p>
             <a:pPr algn="ctr"/>
             <a:r>
-              <a:rPr sz="1100" b="0" i="0">
+              <a:rPr sz="1100" b="0" i="0" dirty="0">
                 <a:solidFill>
                   <a:srgbClr val="BBDEFB"/>
                 </a:solidFill>
               </a:rPr>
-              <a:t>Smart Healthcare Appointment System  |  Mannat Vij</a:t>
+              <a:t>Smart Healthcare Appointment System  </a:t>
             </a:r>
           </a:p>
         </p:txBody>
@@ -7621,6 +7454,7 @@
           <a:lstStyle/>
           <a:p>
             <a:pPr algn="ctr"/>
+            <a:endParaRPr/>
           </a:p>
         </p:txBody>
       </p:sp>
@@ -7664,6 +7498,7 @@
           <a:lstStyle/>
           <a:p>
             <a:pPr algn="ctr"/>
+            <a:endParaRPr/>
           </a:p>
         </p:txBody>
       </p:sp>
@@ -7676,7 +7511,7 @@
         <p:spPr>
           <a:xfrm>
             <a:off x="822960" y="1600200"/>
-            <a:ext cx="10789920" cy="4572000"/>
+            <a:ext cx="10789920" cy="3593291"/>
           </a:xfrm>
           <a:prstGeom prst="rect">
             <a:avLst/>
@@ -7691,13 +7526,45 @@
           <a:p>
             <a:pPr algn="l"/>
             <a:r>
-              <a:rPr sz="1750">
+              <a:rPr sz="1750" dirty="0">
                 <a:solidFill>
                   <a:srgbClr val="1A1A2E"/>
                 </a:solidFill>
               </a:rPr>
               <a:t>In today's fast-paced world, the healthcare sector faces a critical challenge — the growing gap between patients seeking timely medical care and doctors managing overwhelming schedules through outdated, manual processes. Phone-based bookings, long waiting queues, and fragmented paper records result in missed consultations and poor patient experiences.
-The Smart Healthcare Appointment System is a robust, full-stack web application engineered to digitise and streamline the complete appointment lifecycle. Built on a React.js frontend (Material-UI), a Spring Boot RESTful backend, and MongoDB as a flexible NoSQL data store, the platform empowers patients to discover specialist doctors, check real-time availability, and book appointments instantly — while giving doctors full control over their schedules and patient queues.
+The Smart Healthcare Appointment System is a robust, full-stack web application engineered to </a:t>
+            </a:r>
+            <a:r>
+              <a:rPr sz="1750" dirty="0" err="1">
+                <a:solidFill>
+                  <a:srgbClr val="1A1A2E"/>
+                </a:solidFill>
+              </a:rPr>
+              <a:t>digitise</a:t>
+            </a:r>
+            <a:r>
+              <a:rPr sz="1750" dirty="0">
+                <a:solidFill>
+                  <a:srgbClr val="1A1A2E"/>
+                </a:solidFill>
+              </a:rPr>
+              <a:t> and streamline the complete appointment lifecycle. Built on a React.js frontend (Material-UI), a Spring Boot RESTful backend, and MongoDB as a flexible NoSQL data store, the platform empowers patients to discover specialist doctors, check real-time availability,</a:t>
+            </a:r>
+            <a:r>
+              <a:rPr lang="en-US" sz="1750" dirty="0">
+                <a:solidFill>
+                  <a:srgbClr val="1A1A2E"/>
+                </a:solidFill>
+              </a:rPr>
+              <a:t> have AI assistance</a:t>
+            </a:r>
+            <a:r>
+              <a:rPr sz="1750" dirty="0">
+                <a:solidFill>
+                  <a:srgbClr val="1A1A2E"/>
+                </a:solidFill>
+              </a:rPr>
+              <a:t> and book appointments instantly — while giving doctors full control over their schedules and patient queues.
 Secured by industry-standard JWT-based authentication and role-based access control, the system represents a scalable, modern solution to one of healthcare's most persistent operational challenges.</a:t>
             </a:r>
           </a:p>
@@ -7743,6 +7610,7 @@
           <a:lstStyle/>
           <a:p>
             <a:pPr algn="ctr"/>
+            <a:endParaRPr/>
           </a:p>
         </p:txBody>
       </p:sp>
@@ -7820,6 +7688,7 @@
           <a:lstStyle/>
           <a:p>
             <a:pPr algn="ctr"/>
+            <a:endParaRPr/>
           </a:p>
         </p:txBody>
       </p:sp>
@@ -7897,6 +7766,7 @@
           <a:lstStyle/>
           <a:p>
             <a:pPr algn="ctr"/>
+            <a:endParaRPr/>
           </a:p>
         </p:txBody>
       </p:sp>
@@ -7974,6 +7844,7 @@
           <a:lstStyle/>
           <a:p>
             <a:pPr algn="ctr"/>
+            <a:endParaRPr/>
           </a:p>
         </p:txBody>
       </p:sp>
@@ -8051,6 +7922,7 @@
           <a:lstStyle/>
           <a:p>
             <a:pPr algn="ctr"/>
+            <a:endParaRPr/>
           </a:p>
         </p:txBody>
       </p:sp>
@@ -8063,7 +7935,7 @@
         <p:spPr>
           <a:xfrm>
             <a:off x="6775703" y="5998464"/>
-            <a:ext cx="1431036" cy="320040"/>
+            <a:ext cx="1431036" cy="292388"/>
           </a:xfrm>
           <a:prstGeom prst="rect">
             <a:avLst/>
@@ -8078,12 +7950,12 @@
           <a:p>
             <a:pPr algn="ctr"/>
             <a:r>
-              <a:rPr sz="1300" b="1" i="0">
+              <a:rPr sz="1300" b="1" i="0" dirty="0">
                 <a:solidFill>
                   <a:srgbClr val="FFFFFF"/>
                 </a:solidFill>
               </a:rPr>
-              <a:t>Material-UI</a:t>
+              <a:t>UI</a:t>
             </a:r>
           </a:p>
         </p:txBody>
@@ -8128,6 +8000,7 @@
           <a:lstStyle/>
           <a:p>
             <a:pPr algn="ctr"/>
+            <a:endParaRPr/>
           </a:p>
         </p:txBody>
       </p:sp>
@@ -8174,7 +8047,7 @@
 </file>
 
 <file path=ppt/slides/slide4.xml><?xml version="1.0" encoding="utf-8"?>
-<p:sld xmlns:a="http://schemas.openxmlformats.org/drawingml/2006/main" xmlns:p="http://schemas.openxmlformats.org/presentationml/2006/main" xmlns:r="http://schemas.openxmlformats.org/officeDocument/2006/relationships">
+<p:sld xmlns:a="http://schemas.openxmlformats.org/drawingml/2006/main" xmlns:r="http://schemas.openxmlformats.org/officeDocument/2006/relationships" xmlns:p="http://schemas.openxmlformats.org/presentationml/2006/main">
   <p:cSld>
     <p:spTree>
       <p:nvGrpSpPr>
@@ -8182,7 +8055,14 @@
         <p:cNvGrpSpPr/>
         <p:nvPr/>
       </p:nvGrpSpPr>
-      <p:grpSpPr/>
+      <p:grpSpPr>
+        <a:xfrm>
+          <a:off x="0" y="0"/>
+          <a:ext cx="0" cy="0"/>
+          <a:chOff x="0" y="0"/>
+          <a:chExt cx="0" cy="0"/>
+        </a:xfrm>
+      </p:grpSpPr>
       <p:sp>
         <p:nvSpPr>
           <p:cNvPr id="2" name="Rectangle 1"/>
@@ -8223,6 +8103,7 @@
           <a:lstStyle/>
           <a:p>
             <a:pPr algn="ctr"/>
+            <a:endParaRPr/>
           </a:p>
         </p:txBody>
       </p:sp>
@@ -8266,6 +8147,7 @@
           <a:lstStyle/>
           <a:p>
             <a:pPr algn="ctr"/>
+            <a:endParaRPr/>
           </a:p>
         </p:txBody>
       </p:sp>
@@ -8377,6 +8259,7 @@
           <a:lstStyle/>
           <a:p>
             <a:pPr algn="ctr"/>
+            <a:endParaRPr/>
           </a:p>
         </p:txBody>
       </p:sp>
@@ -8420,6 +8303,7 @@
           <a:lstStyle/>
           <a:p>
             <a:pPr algn="ctr"/>
+            <a:endParaRPr/>
           </a:p>
         </p:txBody>
       </p:sp>
@@ -8432,7 +8316,7 @@
         <p:spPr>
           <a:xfrm>
             <a:off x="274320" y="6574536"/>
-            <a:ext cx="11612880" cy="256032"/>
+            <a:ext cx="11612880" cy="261610"/>
           </a:xfrm>
           <a:prstGeom prst="rect">
             <a:avLst/>
@@ -8447,12 +8331,12 @@
           <a:p>
             <a:pPr algn="ctr"/>
             <a:r>
-              <a:rPr sz="1100" b="0" i="0">
+              <a:rPr sz="1100" b="0" i="0" dirty="0">
                 <a:solidFill>
                   <a:srgbClr val="BBDEFB"/>
                 </a:solidFill>
               </a:rPr>
-              <a:t>Smart Healthcare Appointment System  |  Mannat Vij</a:t>
+              <a:t>Smart Healthcare Appointment System </a:t>
             </a:r>
           </a:p>
         </p:txBody>
@@ -8499,6 +8383,7 @@
           <a:lstStyle/>
           <a:p>
             <a:pPr algn="ctr"/>
+            <a:endParaRPr/>
           </a:p>
         </p:txBody>
       </p:sp>
@@ -8542,6 +8427,7 @@
           <a:lstStyle/>
           <a:p>
             <a:pPr algn="ctr"/>
+            <a:endParaRPr/>
           </a:p>
         </p:txBody>
       </p:sp>
@@ -8689,6 +8575,7 @@
           <a:lstStyle/>
           <a:p>
             <a:pPr algn="ctr"/>
+            <a:endParaRPr/>
           </a:p>
         </p:txBody>
       </p:sp>
@@ -8732,6 +8619,7 @@
           <a:lstStyle/>
           <a:p>
             <a:pPr algn="ctr"/>
+            <a:endParaRPr/>
           </a:p>
         </p:txBody>
       </p:sp>
@@ -8879,6 +8767,7 @@
           <a:lstStyle/>
           <a:p>
             <a:pPr algn="ctr"/>
+            <a:endParaRPr/>
           </a:p>
         </p:txBody>
       </p:sp>
@@ -8922,6 +8811,7 @@
           <a:lstStyle/>
           <a:p>
             <a:pPr algn="ctr"/>
+            <a:endParaRPr/>
           </a:p>
         </p:txBody>
       </p:sp>
@@ -9069,6 +8959,7 @@
           <a:lstStyle/>
           <a:p>
             <a:pPr algn="ctr"/>
+            <a:endParaRPr/>
           </a:p>
         </p:txBody>
       </p:sp>
@@ -9112,6 +9003,7 @@
           <a:lstStyle/>
           <a:p>
             <a:pPr algn="ctr"/>
+            <a:endParaRPr/>
           </a:p>
         </p:txBody>
       </p:sp>
@@ -9259,6 +9151,7 @@
           <a:lstStyle/>
           <a:p>
             <a:pPr algn="ctr"/>
+            <a:endParaRPr/>
           </a:p>
         </p:txBody>
       </p:sp>
@@ -9302,6 +9195,7 @@
           <a:lstStyle/>
           <a:p>
             <a:pPr algn="ctr"/>
+            <a:endParaRPr/>
           </a:p>
         </p:txBody>
       </p:sp>
@@ -9416,7 +9310,7 @@
 </file>
 
 <file path=ppt/slides/slide5.xml><?xml version="1.0" encoding="utf-8"?>
-<p:sld xmlns:a="http://schemas.openxmlformats.org/drawingml/2006/main" xmlns:p="http://schemas.openxmlformats.org/presentationml/2006/main" xmlns:r="http://schemas.openxmlformats.org/officeDocument/2006/relationships">
+<p:sld xmlns:a="http://schemas.openxmlformats.org/drawingml/2006/main" xmlns:r="http://schemas.openxmlformats.org/officeDocument/2006/relationships" xmlns:p="http://schemas.openxmlformats.org/presentationml/2006/main">
   <p:cSld>
     <p:spTree>
       <p:nvGrpSpPr>
@@ -9424,7 +9318,14 @@
         <p:cNvGrpSpPr/>
         <p:nvPr/>
       </p:nvGrpSpPr>
-      <p:grpSpPr/>
+      <p:grpSpPr>
+        <a:xfrm>
+          <a:off x="0" y="0"/>
+          <a:ext cx="0" cy="0"/>
+          <a:chOff x="0" y="0"/>
+          <a:chExt cx="0" cy="0"/>
+        </a:xfrm>
+      </p:grpSpPr>
       <p:sp>
         <p:nvSpPr>
           <p:cNvPr id="2" name="Rectangle 1"/>
@@ -9465,6 +9366,7 @@
           <a:lstStyle/>
           <a:p>
             <a:pPr algn="ctr"/>
+            <a:endParaRPr/>
           </a:p>
         </p:txBody>
       </p:sp>
@@ -9508,6 +9410,7 @@
           <a:lstStyle/>
           <a:p>
             <a:pPr algn="ctr"/>
+            <a:endParaRPr/>
           </a:p>
         </p:txBody>
       </p:sp>
@@ -9619,6 +9522,7 @@
           <a:lstStyle/>
           <a:p>
             <a:pPr algn="ctr"/>
+            <a:endParaRPr/>
           </a:p>
         </p:txBody>
       </p:sp>
@@ -9662,6 +9566,7 @@
           <a:lstStyle/>
           <a:p>
             <a:pPr algn="ctr"/>
+            <a:endParaRPr/>
           </a:p>
         </p:txBody>
       </p:sp>
@@ -9673,8 +9578,8 @@
         </p:nvSpPr>
         <p:spPr>
           <a:xfrm>
-            <a:off x="274320" y="6574536"/>
-            <a:ext cx="11612880" cy="256032"/>
+            <a:off x="274320" y="6588252"/>
+            <a:ext cx="11612880" cy="261610"/>
           </a:xfrm>
           <a:prstGeom prst="rect">
             <a:avLst/>
@@ -9689,12 +9594,12 @@
           <a:p>
             <a:pPr algn="ctr"/>
             <a:r>
-              <a:rPr sz="1100" b="0" i="0">
+              <a:rPr sz="1100" b="0" i="0" dirty="0">
                 <a:solidFill>
                   <a:srgbClr val="BBDEFB"/>
                 </a:solidFill>
               </a:rPr>
-              <a:t>Smart Healthcare Appointment System  |  Mannat Vij</a:t>
+              <a:t>Smart Healthcare Appointment System  </a:t>
             </a:r>
           </a:p>
         </p:txBody>
@@ -9741,6 +9646,7 @@
           <a:lstStyle/>
           <a:p>
             <a:pPr algn="ctr"/>
+            <a:endParaRPr/>
           </a:p>
         </p:txBody>
       </p:sp>
@@ -9784,6 +9690,7 @@
           <a:lstStyle/>
           <a:p>
             <a:pPr algn="ctr"/>
+            <a:endParaRPr/>
           </a:p>
         </p:txBody>
       </p:sp>
@@ -9931,6 +9838,7 @@
           <a:lstStyle/>
           <a:p>
             <a:pPr algn="ctr"/>
+            <a:endParaRPr/>
           </a:p>
         </p:txBody>
       </p:sp>
@@ -9974,6 +9882,7 @@
           <a:lstStyle/>
           <a:p>
             <a:pPr algn="ctr"/>
+            <a:endParaRPr/>
           </a:p>
         </p:txBody>
       </p:sp>
@@ -10121,6 +10030,7 @@
           <a:lstStyle/>
           <a:p>
             <a:pPr algn="ctr"/>
+            <a:endParaRPr/>
           </a:p>
         </p:txBody>
       </p:sp>
@@ -10164,6 +10074,7 @@
           <a:lstStyle/>
           <a:p>
             <a:pPr algn="ctr"/>
+            <a:endParaRPr/>
           </a:p>
         </p:txBody>
       </p:sp>
@@ -10244,7 +10155,7 @@
         <p:spPr>
           <a:xfrm>
             <a:off x="941832" y="4425696"/>
-            <a:ext cx="5029200" cy="749808"/>
+            <a:ext cx="5029200" cy="446276"/>
           </a:xfrm>
           <a:prstGeom prst="rect">
             <a:avLst/>
@@ -10259,12 +10170,60 @@
           <a:p>
             <a:pPr algn="l"/>
             <a:r>
-              <a:rPr sz="1150" b="0" i="0">
+              <a:rPr sz="1150" b="0" i="0" dirty="0">
                 <a:solidFill>
                   <a:srgbClr val="555566"/>
                 </a:solidFill>
               </a:rPr>
-              <a:t>MongoDB collections: users (polymorphic), appointments, chat_sessions; Indexes: patientId, doctorId, email, username.</a:t>
+              <a:t>MongoDB collections: users, appointments, </a:t>
+            </a:r>
+            <a:r>
+              <a:rPr sz="1150" b="0" i="0" dirty="0" err="1">
+                <a:solidFill>
+                  <a:srgbClr val="555566"/>
+                </a:solidFill>
+              </a:rPr>
+              <a:t>chat_sessions</a:t>
+            </a:r>
+            <a:r>
+              <a:rPr sz="1150" b="0" i="0" dirty="0">
+                <a:solidFill>
+                  <a:srgbClr val="555566"/>
+                </a:solidFill>
+              </a:rPr>
+              <a:t>; Indexes: </a:t>
+            </a:r>
+            <a:r>
+              <a:rPr sz="1150" b="0" i="0" dirty="0" err="1">
+                <a:solidFill>
+                  <a:srgbClr val="555566"/>
+                </a:solidFill>
+              </a:rPr>
+              <a:t>patientId</a:t>
+            </a:r>
+            <a:r>
+              <a:rPr sz="1150" b="0" i="0" dirty="0">
+                <a:solidFill>
+                  <a:srgbClr val="555566"/>
+                </a:solidFill>
+              </a:rPr>
+              <a:t>, </a:t>
+            </a:r>
+            <a:r>
+              <a:rPr sz="1150" b="0" i="0" dirty="0" err="1">
+                <a:solidFill>
+                  <a:srgbClr val="555566"/>
+                </a:solidFill>
+              </a:rPr>
+              <a:t>doctorId</a:t>
+            </a:r>
+            <a:r>
+              <a:rPr sz="1150" b="0" i="0" dirty="0">
+                <a:solidFill>
+                  <a:srgbClr val="555566"/>
+                </a:solidFill>
+              </a:rPr>
+              <a:t>, email, username.</a:t>
             </a:r>
           </a:p>
         </p:txBody>
@@ -10311,6 +10270,7 @@
           <a:lstStyle/>
           <a:p>
             <a:pPr algn="ctr"/>
+            <a:endParaRPr/>
           </a:p>
         </p:txBody>
       </p:sp>
@@ -10354,6 +10314,7 @@
           <a:lstStyle/>
           <a:p>
             <a:pPr algn="ctr"/>
+            <a:endParaRPr/>
           </a:p>
         </p:txBody>
       </p:sp>
@@ -10433,7 +10394,7 @@
         </p:nvSpPr>
         <p:spPr>
           <a:xfrm>
-            <a:off x="941832" y="5742432"/>
+            <a:off x="950976" y="5600700"/>
             <a:ext cx="5029200" cy="749808"/>
           </a:xfrm>
           <a:prstGeom prst="rect">
@@ -10449,12 +10410,204 @@
           <a:p>
             <a:pPr algn="l"/>
             <a:r>
-              <a:rPr sz="1150" b="0" i="0">
+              <a:rPr sz="1150" b="0" i="0" dirty="0">
                 <a:solidFill>
                   <a:srgbClr val="555566"/>
                 </a:solidFill>
               </a:rPr>
-              <a:t>Auth: POST /api/auth/register, /api/auth/login  |  Users: GET/PUT /api/users/profile, PUT /api/users/password  |  Doctors: GET /api/doctors, /api/doctors/search, /api/doctors/available, PUT /api/doctors/availability  |  Appointments: POST /api/appointments, GET /api/appointments, PUT /api/appointments/{id}/status, DELETE /api/appointments/{id}</a:t>
+              <a:t>Auth: POST /</a:t>
+            </a:r>
+            <a:r>
+              <a:rPr sz="1150" b="0" i="0" dirty="0" err="1">
+                <a:solidFill>
+                  <a:srgbClr val="555566"/>
+                </a:solidFill>
+              </a:rPr>
+              <a:t>api</a:t>
+            </a:r>
+            <a:r>
+              <a:rPr sz="1150" b="0" i="0" dirty="0">
+                <a:solidFill>
+                  <a:srgbClr val="555566"/>
+                </a:solidFill>
+              </a:rPr>
+              <a:t>/auth/register, /</a:t>
+            </a:r>
+            <a:r>
+              <a:rPr sz="1150" b="0" i="0" dirty="0" err="1">
+                <a:solidFill>
+                  <a:srgbClr val="555566"/>
+                </a:solidFill>
+              </a:rPr>
+              <a:t>api</a:t>
+            </a:r>
+            <a:r>
+              <a:rPr sz="1150" b="0" i="0" dirty="0">
+                <a:solidFill>
+                  <a:srgbClr val="555566"/>
+                </a:solidFill>
+              </a:rPr>
+              <a:t>/auth/login  |  Users: GET/PUT /</a:t>
+            </a:r>
+            <a:r>
+              <a:rPr sz="1150" b="0" i="0" dirty="0" err="1">
+                <a:solidFill>
+                  <a:srgbClr val="555566"/>
+                </a:solidFill>
+              </a:rPr>
+              <a:t>api</a:t>
+            </a:r>
+            <a:r>
+              <a:rPr sz="1150" b="0" i="0" dirty="0">
+                <a:solidFill>
+                  <a:srgbClr val="555566"/>
+                </a:solidFill>
+              </a:rPr>
+              <a:t>/users/profile, PUT /</a:t>
+            </a:r>
+            <a:r>
+              <a:rPr sz="1150" b="0" i="0" dirty="0" err="1">
+                <a:solidFill>
+                  <a:srgbClr val="555566"/>
+                </a:solidFill>
+              </a:rPr>
+              <a:t>api</a:t>
+            </a:r>
+            <a:r>
+              <a:rPr sz="1150" b="0" i="0" dirty="0">
+                <a:solidFill>
+                  <a:srgbClr val="555566"/>
+                </a:solidFill>
+              </a:rPr>
+              <a:t>/users/password  |  Doctors: GET /</a:t>
+            </a:r>
+            <a:r>
+              <a:rPr sz="1150" b="0" i="0" dirty="0" err="1">
+                <a:solidFill>
+                  <a:srgbClr val="555566"/>
+                </a:solidFill>
+              </a:rPr>
+              <a:t>api</a:t>
+            </a:r>
+            <a:r>
+              <a:rPr sz="1150" b="0" i="0" dirty="0">
+                <a:solidFill>
+                  <a:srgbClr val="555566"/>
+                </a:solidFill>
+              </a:rPr>
+              <a:t>/doctors, /</a:t>
+            </a:r>
+            <a:r>
+              <a:rPr sz="1150" b="0" i="0" dirty="0" err="1">
+                <a:solidFill>
+                  <a:srgbClr val="555566"/>
+                </a:solidFill>
+              </a:rPr>
+              <a:t>api</a:t>
+            </a:r>
+            <a:r>
+              <a:rPr sz="1150" b="0" i="0" dirty="0">
+                <a:solidFill>
+                  <a:srgbClr val="555566"/>
+                </a:solidFill>
+              </a:rPr>
+              <a:t>/doctors/search, /</a:t>
+            </a:r>
+            <a:r>
+              <a:rPr sz="1150" b="0" i="0" dirty="0" err="1">
+                <a:solidFill>
+                  <a:srgbClr val="555566"/>
+                </a:solidFill>
+              </a:rPr>
+              <a:t>api</a:t>
+            </a:r>
+            <a:r>
+              <a:rPr sz="1150" b="0" i="0" dirty="0">
+                <a:solidFill>
+                  <a:srgbClr val="555566"/>
+                </a:solidFill>
+              </a:rPr>
+              <a:t>/doctors/available, PUT /</a:t>
+            </a:r>
+            <a:r>
+              <a:rPr sz="1150" b="0" i="0" dirty="0" err="1">
+                <a:solidFill>
+                  <a:srgbClr val="555566"/>
+                </a:solidFill>
+              </a:rPr>
+              <a:t>api</a:t>
+            </a:r>
+            <a:r>
+              <a:rPr sz="1150" b="0" i="0" dirty="0">
+                <a:solidFill>
+                  <a:srgbClr val="555566"/>
+                </a:solidFill>
+              </a:rPr>
+              <a:t>/doctors/availability  |  Appointments: POST /</a:t>
+            </a:r>
+            <a:r>
+              <a:rPr sz="1150" b="0" i="0" dirty="0" err="1">
+                <a:solidFill>
+                  <a:srgbClr val="555566"/>
+                </a:solidFill>
+              </a:rPr>
+              <a:t>api</a:t>
+            </a:r>
+            <a:r>
+              <a:rPr sz="1150" b="0" i="0" dirty="0">
+                <a:solidFill>
+                  <a:srgbClr val="555566"/>
+                </a:solidFill>
+              </a:rPr>
+              <a:t>/appointments, GET /</a:t>
+            </a:r>
+            <a:r>
+              <a:rPr sz="1150" b="0" i="0" dirty="0" err="1">
+                <a:solidFill>
+                  <a:srgbClr val="555566"/>
+                </a:solidFill>
+              </a:rPr>
+              <a:t>api</a:t>
+            </a:r>
+            <a:r>
+              <a:rPr sz="1150" b="0" i="0" dirty="0">
+                <a:solidFill>
+                  <a:srgbClr val="555566"/>
+                </a:solidFill>
+              </a:rPr>
+              <a:t>/appointments, PUT /</a:t>
+            </a:r>
+            <a:r>
+              <a:rPr sz="1150" b="0" i="0" dirty="0" err="1">
+                <a:solidFill>
+                  <a:srgbClr val="555566"/>
+                </a:solidFill>
+              </a:rPr>
+              <a:t>api</a:t>
+            </a:r>
+            <a:r>
+              <a:rPr sz="1150" b="0" i="0" dirty="0">
+                <a:solidFill>
+                  <a:srgbClr val="555566"/>
+                </a:solidFill>
+              </a:rPr>
+              <a:t>/appointments/{id}/status, DELETE /</a:t>
+            </a:r>
+            <a:r>
+              <a:rPr sz="1150" b="0" i="0" dirty="0" err="1">
+                <a:solidFill>
+                  <a:srgbClr val="555566"/>
+                </a:solidFill>
+              </a:rPr>
+              <a:t>api</a:t>
+            </a:r>
+            <a:r>
+              <a:rPr sz="1150" b="0" i="0" dirty="0">
+                <a:solidFill>
+                  <a:srgbClr val="555566"/>
+                </a:solidFill>
+              </a:rPr>
+              <a:t>/appointments/{id}</a:t>
             </a:r>
           </a:p>
         </p:txBody>
@@ -10501,6 +10654,7 @@
           <a:lstStyle/>
           <a:p>
             <a:pPr algn="ctr"/>
+            <a:endParaRPr/>
           </a:p>
         </p:txBody>
       </p:sp>
@@ -10544,6 +10698,7 @@
           <a:lstStyle/>
           <a:p>
             <a:pPr algn="ctr"/>
+            <a:endParaRPr/>
           </a:p>
         </p:txBody>
       </p:sp>
@@ -10691,6 +10846,7 @@
           <a:lstStyle/>
           <a:p>
             <a:pPr algn="ctr"/>
+            <a:endParaRPr/>
           </a:p>
         </p:txBody>
       </p:sp>
@@ -10734,6 +10890,7 @@
           <a:lstStyle/>
           <a:p>
             <a:pPr algn="ctr"/>
+            <a:endParaRPr/>
           </a:p>
         </p:txBody>
       </p:sp>
@@ -10881,6 +11038,7 @@
           <a:lstStyle/>
           <a:p>
             <a:pPr algn="ctr"/>
+            <a:endParaRPr/>
           </a:p>
         </p:txBody>
       </p:sp>
@@ -10924,6 +11082,7 @@
           <a:lstStyle/>
           <a:p>
             <a:pPr algn="ctr"/>
+            <a:endParaRPr/>
           </a:p>
         </p:txBody>
       </p:sp>
@@ -11004,7 +11163,7 @@
         <p:spPr>
           <a:xfrm>
             <a:off x="6821424" y="4425696"/>
-            <a:ext cx="5029200" cy="749808"/>
+            <a:ext cx="5029200" cy="446276"/>
           </a:xfrm>
           <a:prstGeom prst="rect">
             <a:avLst/>
@@ -11019,12 +11178,28 @@
           <a:p>
             <a:pPr algn="l"/>
             <a:r>
-              <a:rPr sz="1150" b="0" i="0">
+              <a:rPr sz="1150" b="0" i="0" dirty="0">
                 <a:solidFill>
                   <a:srgbClr val="555566"/>
                 </a:solidFill>
               </a:rPr>
-              <a:t>React SPA with protected routes · Axios JWT interceptors · Role-aware dashboards · Responsive layout (desktop sidebar + mobile bottom nav).</a:t>
+              <a:t>React SPA with protected routes </a:t>
+            </a:r>
+            <a:r>
+              <a:rPr lang="en-US" sz="1150" b="0" i="0" dirty="0">
+                <a:solidFill>
+                  <a:srgbClr val="555566"/>
+                </a:solidFill>
+              </a:rPr>
+              <a:t>· </a:t>
+            </a:r>
+            <a:r>
+              <a:rPr sz="1150" b="0" i="0" dirty="0">
+                <a:solidFill>
+                  <a:srgbClr val="555566"/>
+                </a:solidFill>
+              </a:rPr>
+              <a:t>Role-aware dashboards · Responsive layout (desktop sidebar + mobile bottom nav).</a:t>
             </a:r>
           </a:p>
         </p:txBody>
@@ -11071,6 +11246,7 @@
           <a:lstStyle/>
           <a:p>
             <a:pPr algn="ctr"/>
+            <a:endParaRPr/>
           </a:p>
         </p:txBody>
       </p:sp>
@@ -11114,6 +11290,7 @@
           <a:lstStyle/>
           <a:p>
             <a:pPr algn="ctr"/>
+            <a:endParaRPr/>
           </a:p>
         </p:txBody>
       </p:sp>
@@ -11209,7 +11386,7 @@
           <a:p>
             <a:pPr algn="l"/>
             <a:r>
-              <a:rPr sz="1150" b="0" i="0">
+              <a:rPr sz="1150" b="0" i="0" dirty="0">
                 <a:solidFill>
                   <a:srgbClr val="555566"/>
                 </a:solidFill>
@@ -11228,7 +11405,7 @@
 </file>
 
 <file path=ppt/slides/slide6.xml><?xml version="1.0" encoding="utf-8"?>
-<p:sld xmlns:a="http://schemas.openxmlformats.org/drawingml/2006/main" xmlns:p="http://schemas.openxmlformats.org/presentationml/2006/main" xmlns:r="http://schemas.openxmlformats.org/officeDocument/2006/relationships">
+<p:sld xmlns:a="http://schemas.openxmlformats.org/drawingml/2006/main" xmlns:r="http://schemas.openxmlformats.org/officeDocument/2006/relationships" xmlns:p="http://schemas.openxmlformats.org/presentationml/2006/main">
   <p:cSld>
     <p:spTree>
       <p:nvGrpSpPr>
@@ -11236,7 +11413,14 @@
         <p:cNvGrpSpPr/>
         <p:nvPr/>
       </p:nvGrpSpPr>
-      <p:grpSpPr/>
+      <p:grpSpPr>
+        <a:xfrm>
+          <a:off x="0" y="0"/>
+          <a:ext cx="0" cy="0"/>
+          <a:chOff x="0" y="0"/>
+          <a:chExt cx="0" cy="0"/>
+        </a:xfrm>
+      </p:grpSpPr>
       <p:sp>
         <p:nvSpPr>
           <p:cNvPr id="2" name="Rectangle 1"/>
@@ -11277,6 +11461,7 @@
           <a:lstStyle/>
           <a:p>
             <a:pPr algn="ctr"/>
+            <a:endParaRPr/>
           </a:p>
         </p:txBody>
       </p:sp>
@@ -11320,6 +11505,7 @@
           <a:lstStyle/>
           <a:p>
             <a:pPr algn="ctr"/>
+            <a:endParaRPr/>
           </a:p>
         </p:txBody>
       </p:sp>
@@ -11431,6 +11617,7 @@
           <a:lstStyle/>
           <a:p>
             <a:pPr algn="ctr"/>
+            <a:endParaRPr/>
           </a:p>
         </p:txBody>
       </p:sp>
@@ -11474,6 +11661,7 @@
           <a:lstStyle/>
           <a:p>
             <a:pPr algn="ctr"/>
+            <a:endParaRPr/>
           </a:p>
         </p:txBody>
       </p:sp>
@@ -11486,7 +11674,7 @@
         <p:spPr>
           <a:xfrm>
             <a:off x="274320" y="6574536"/>
-            <a:ext cx="11612880" cy="256032"/>
+            <a:ext cx="11612880" cy="261610"/>
           </a:xfrm>
           <a:prstGeom prst="rect">
             <a:avLst/>
@@ -11501,12 +11689,12 @@
           <a:p>
             <a:pPr algn="ctr"/>
             <a:r>
-              <a:rPr sz="1100" b="0" i="0">
+              <a:rPr sz="1100" b="0" i="0" dirty="0">
                 <a:solidFill>
                   <a:srgbClr val="BBDEFB"/>
                 </a:solidFill>
               </a:rPr>
-              <a:t>Smart Healthcare Appointment System  |  Mannat Vij</a:t>
+              <a:t>Smart Healthcare Appointment System  </a:t>
             </a:r>
           </a:p>
         </p:txBody>
@@ -11553,6 +11741,7 @@
           <a:lstStyle/>
           <a:p>
             <a:pPr algn="ctr"/>
+            <a:endParaRPr/>
           </a:p>
         </p:txBody>
       </p:sp>
@@ -11596,6 +11785,7 @@
           <a:lstStyle/>
           <a:p>
             <a:pPr algn="ctr"/>
+            <a:endParaRPr/>
           </a:p>
         </p:txBody>
       </p:sp>
@@ -11969,40 +12159,6 @@
                 </a:solidFill>
               </a:rPr>
               <a:t>  ›  SMS / Email notifications</a:t>
-            </a:r>
-          </a:p>
-        </p:txBody>
-      </p:sp>
-      <p:sp>
-        <p:nvSpPr>
-          <p:cNvPr id="22" name="TextBox 21"/>
-          <p:cNvSpPr txBox="1"/>
-          <p:nvPr/>
-        </p:nvSpPr>
-        <p:spPr>
-          <a:xfrm>
-            <a:off x="502920" y="5943600"/>
-            <a:ext cx="5212080" cy="384048"/>
-          </a:xfrm>
-          <a:prstGeom prst="rect">
-            <a:avLst/>
-          </a:prstGeom>
-          <a:noFill/>
-        </p:spPr>
-        <p:txBody>
-          <a:bodyPr wrap="square">
-            <a:spAutoFit/>
-          </a:bodyPr>
-          <a:lstStyle/>
-          <a:p>
-            <a:pPr algn="l"/>
-            <a:r>
-              <a:rPr sz="1300" b="0" i="0">
-                <a:solidFill>
-                  <a:srgbClr val="1A1A2E"/>
-                </a:solidFill>
-              </a:rPr>
-              <a:t>  ›  Payment gateway integration</a:t>
             </a:r>
           </a:p>
         </p:txBody>
@@ -12049,6 +12205,7 @@
           <a:lstStyle/>
           <a:p>
             <a:pPr algn="ctr"/>
+            <a:endParaRPr/>
           </a:p>
         </p:txBody>
       </p:sp>
@@ -12092,6 +12249,7 @@
           <a:lstStyle/>
           <a:p>
             <a:pPr algn="ctr"/>
+            <a:endParaRPr/>
           </a:p>
         </p:txBody>
       </p:sp>
@@ -12444,40 +12602,6 @@
         <p:spPr>
           <a:xfrm>
             <a:off x="6446520" y="5541264"/>
-            <a:ext cx="5212080" cy="384048"/>
-          </a:xfrm>
-          <a:prstGeom prst="rect">
-            <a:avLst/>
-          </a:prstGeom>
-          <a:noFill/>
-        </p:spPr>
-        <p:txBody>
-          <a:bodyPr wrap="square">
-            <a:spAutoFit/>
-          </a:bodyPr>
-          <a:lstStyle/>
-          <a:p>
-            <a:pPr algn="l"/>
-            <a:r>
-              <a:rPr sz="1300" b="0" i="0">
-                <a:solidFill>
-                  <a:srgbClr val="C62828"/>
-                </a:solidFill>
-              </a:rPr>
-              <a:t>  ✗  Planned for next phase</a:t>
-            </a:r>
-          </a:p>
-        </p:txBody>
-      </p:sp>
-      <p:sp>
-        <p:nvSpPr>
-          <p:cNvPr id="36" name="TextBox 35"/>
-          <p:cNvSpPr txBox="1"/>
-          <p:nvPr/>
-        </p:nvSpPr>
-        <p:spPr>
-          <a:xfrm>
-            <a:off x="6446520" y="5943600"/>
             <a:ext cx="5212080" cy="384048"/>
           </a:xfrm>
           <a:prstGeom prst="rect">
@@ -12512,7 +12636,7 @@
 </file>
 
 <file path=ppt/slides/slide7.xml><?xml version="1.0" encoding="utf-8"?>
-<p:sld xmlns:a="http://schemas.openxmlformats.org/drawingml/2006/main" xmlns:p="http://schemas.openxmlformats.org/presentationml/2006/main" xmlns:r="http://schemas.openxmlformats.org/officeDocument/2006/relationships">
+<p:sld xmlns:a="http://schemas.openxmlformats.org/drawingml/2006/main" xmlns:r="http://schemas.openxmlformats.org/officeDocument/2006/relationships" xmlns:p="http://schemas.openxmlformats.org/presentationml/2006/main">
   <p:cSld>
     <p:spTree>
       <p:nvGrpSpPr>
@@ -12520,7 +12644,14 @@
         <p:cNvGrpSpPr/>
         <p:nvPr/>
       </p:nvGrpSpPr>
-      <p:grpSpPr/>
+      <p:grpSpPr>
+        <a:xfrm>
+          <a:off x="0" y="0"/>
+          <a:ext cx="0" cy="0"/>
+          <a:chOff x="0" y="0"/>
+          <a:chExt cx="0" cy="0"/>
+        </a:xfrm>
+      </p:grpSpPr>
       <p:sp>
         <p:nvSpPr>
           <p:cNvPr id="2" name="Rectangle 1"/>
@@ -12561,6 +12692,7 @@
           <a:lstStyle/>
           <a:p>
             <a:pPr algn="ctr"/>
+            <a:endParaRPr/>
           </a:p>
         </p:txBody>
       </p:sp>
@@ -12604,6 +12736,7 @@
           <a:lstStyle/>
           <a:p>
             <a:pPr algn="ctr"/>
+            <a:endParaRPr/>
           </a:p>
         </p:txBody>
       </p:sp>
@@ -12715,6 +12848,7 @@
           <a:lstStyle/>
           <a:p>
             <a:pPr algn="ctr"/>
+            <a:endParaRPr/>
           </a:p>
         </p:txBody>
       </p:sp>
@@ -12758,6 +12892,7 @@
           <a:lstStyle/>
           <a:p>
             <a:pPr algn="ctr"/>
+            <a:endParaRPr/>
           </a:p>
         </p:txBody>
       </p:sp>
@@ -12769,8 +12904,8 @@
         </p:nvSpPr>
         <p:spPr>
           <a:xfrm>
-            <a:off x="274320" y="6574536"/>
-            <a:ext cx="11612880" cy="256032"/>
+            <a:off x="282271" y="6574536"/>
+            <a:ext cx="11612880" cy="261610"/>
           </a:xfrm>
           <a:prstGeom prst="rect">
             <a:avLst/>
@@ -12785,12 +12920,12 @@
           <a:p>
             <a:pPr algn="ctr"/>
             <a:r>
-              <a:rPr sz="1100" b="0" i="0">
+              <a:rPr sz="1100" b="0" i="0" dirty="0">
                 <a:solidFill>
                   <a:srgbClr val="BBDEFB"/>
                 </a:solidFill>
               </a:rPr>
-              <a:t>Smart Healthcare Appointment System  |  Mannat Vij</a:t>
+              <a:t>Smart Healthcare Appointment System  </a:t>
             </a:r>
           </a:p>
         </p:txBody>
@@ -12837,6 +12972,7 @@
           <a:lstStyle/>
           <a:p>
             <a:pPr algn="ctr"/>
+            <a:endParaRPr/>
           </a:p>
         </p:txBody>
       </p:sp>
@@ -12904,6 +13040,7 @@
           <a:lstStyle/>
           <a:p>
             <a:pPr algn="ctr"/>
+            <a:endParaRPr/>
           </a:p>
         </p:txBody>
       </p:sp>
@@ -12983,6 +13120,7 @@
           <a:lstStyle/>
           <a:p>
             <a:pPr algn="ctr"/>
+            <a:endParaRPr/>
           </a:p>
         </p:txBody>
       </p:sp>
@@ -13050,6 +13188,7 @@
           <a:lstStyle/>
           <a:p>
             <a:pPr algn="ctr"/>
+            <a:endParaRPr/>
           </a:p>
         </p:txBody>
       </p:sp>
@@ -13096,7 +13235,7 @@
 </file>
 
 <file path=ppt/slides/slide8.xml><?xml version="1.0" encoding="utf-8"?>
-<p:sld xmlns:a="http://schemas.openxmlformats.org/drawingml/2006/main" xmlns:p="http://schemas.openxmlformats.org/presentationml/2006/main" xmlns:r="http://schemas.openxmlformats.org/officeDocument/2006/relationships">
+<p:sld xmlns:a="http://schemas.openxmlformats.org/drawingml/2006/main" xmlns:r="http://schemas.openxmlformats.org/officeDocument/2006/relationships" xmlns:p="http://schemas.openxmlformats.org/presentationml/2006/main">
   <p:cSld>
     <p:spTree>
       <p:nvGrpSpPr>
@@ -13104,7 +13243,14 @@
         <p:cNvGrpSpPr/>
         <p:nvPr/>
       </p:nvGrpSpPr>
-      <p:grpSpPr/>
+      <p:grpSpPr>
+        <a:xfrm>
+          <a:off x="0" y="0"/>
+          <a:ext cx="0" cy="0"/>
+          <a:chOff x="0" y="0"/>
+          <a:chExt cx="0" cy="0"/>
+        </a:xfrm>
+      </p:grpSpPr>
       <p:sp>
         <p:nvSpPr>
           <p:cNvPr id="2" name="Rectangle 1"/>
@@ -13145,6 +13291,7 @@
           <a:lstStyle/>
           <a:p>
             <a:pPr algn="ctr"/>
+            <a:endParaRPr/>
           </a:p>
         </p:txBody>
       </p:sp>
@@ -13188,6 +13335,7 @@
           <a:lstStyle/>
           <a:p>
             <a:pPr algn="ctr"/>
+            <a:endParaRPr/>
           </a:p>
         </p:txBody>
       </p:sp>
@@ -13299,6 +13447,7 @@
           <a:lstStyle/>
           <a:p>
             <a:pPr algn="ctr"/>
+            <a:endParaRPr/>
           </a:p>
         </p:txBody>
       </p:sp>
@@ -13342,6 +13491,7 @@
           <a:lstStyle/>
           <a:p>
             <a:pPr algn="ctr"/>
+            <a:endParaRPr/>
           </a:p>
         </p:txBody>
       </p:sp>
@@ -13354,7 +13504,7 @@
         <p:spPr>
           <a:xfrm>
             <a:off x="274320" y="6574536"/>
-            <a:ext cx="11612880" cy="256032"/>
+            <a:ext cx="11612880" cy="261610"/>
           </a:xfrm>
           <a:prstGeom prst="rect">
             <a:avLst/>
@@ -13369,12 +13519,12 @@
           <a:p>
             <a:pPr algn="ctr"/>
             <a:r>
-              <a:rPr sz="1100" b="0" i="0">
+              <a:rPr sz="1100" b="0" i="0" dirty="0">
                 <a:solidFill>
                   <a:srgbClr val="BBDEFB"/>
                 </a:solidFill>
               </a:rPr>
-              <a:t>Smart Healthcare Appointment System  |  Mannat Vij</a:t>
+              <a:t>Smart Healthcare Appointment System  </a:t>
             </a:r>
           </a:p>
         </p:txBody>
@@ -13421,6 +13571,7 @@
           <a:lstStyle/>
           <a:p>
             <a:pPr algn="ctr"/>
+            <a:endParaRPr/>
           </a:p>
         </p:txBody>
       </p:sp>
@@ -13488,6 +13639,7 @@
           <a:lstStyle/>
           <a:p>
             <a:pPr algn="ctr"/>
+            <a:endParaRPr/>
           </a:p>
         </p:txBody>
       </p:sp>
@@ -13567,6 +13719,7 @@
           <a:lstStyle/>
           <a:p>
             <a:pPr algn="ctr"/>
+            <a:endParaRPr/>
           </a:p>
         </p:txBody>
       </p:sp>
@@ -13634,6 +13787,7 @@
           <a:lstStyle/>
           <a:p>
             <a:pPr algn="ctr"/>
+            <a:endParaRPr/>
           </a:p>
         </p:txBody>
       </p:sp>
@@ -13680,7 +13834,7 @@
 </file>
 
 <file path=ppt/slides/slide9.xml><?xml version="1.0" encoding="utf-8"?>
-<p:sld xmlns:a="http://schemas.openxmlformats.org/drawingml/2006/main" xmlns:p="http://schemas.openxmlformats.org/presentationml/2006/main" xmlns:r="http://schemas.openxmlformats.org/officeDocument/2006/relationships">
+<p:sld xmlns:a="http://schemas.openxmlformats.org/drawingml/2006/main" xmlns:r="http://schemas.openxmlformats.org/officeDocument/2006/relationships" xmlns:p="http://schemas.openxmlformats.org/presentationml/2006/main">
   <p:cSld>
     <p:spTree>
       <p:nvGrpSpPr>
@@ -13688,7 +13842,14 @@
         <p:cNvGrpSpPr/>
         <p:nvPr/>
       </p:nvGrpSpPr>
-      <p:grpSpPr/>
+      <p:grpSpPr>
+        <a:xfrm>
+          <a:off x="0" y="0"/>
+          <a:ext cx="0" cy="0"/>
+          <a:chOff x="0" y="0"/>
+          <a:chExt cx="0" cy="0"/>
+        </a:xfrm>
+      </p:grpSpPr>
       <p:sp>
         <p:nvSpPr>
           <p:cNvPr id="2" name="Rectangle 1"/>
@@ -13729,6 +13890,7 @@
           <a:lstStyle/>
           <a:p>
             <a:pPr algn="ctr"/>
+            <a:endParaRPr/>
           </a:p>
         </p:txBody>
       </p:sp>
@@ -13772,6 +13934,7 @@
           <a:lstStyle/>
           <a:p>
             <a:pPr algn="ctr"/>
+            <a:endParaRPr/>
           </a:p>
         </p:txBody>
       </p:sp>
@@ -13883,6 +14046,7 @@
           <a:lstStyle/>
           <a:p>
             <a:pPr algn="ctr"/>
+            <a:endParaRPr/>
           </a:p>
         </p:txBody>
       </p:sp>
@@ -13926,6 +14090,7 @@
           <a:lstStyle/>
           <a:p>
             <a:pPr algn="ctr"/>
+            <a:endParaRPr/>
           </a:p>
         </p:txBody>
       </p:sp>
@@ -13938,7 +14103,7 @@
         <p:spPr>
           <a:xfrm>
             <a:off x="274320" y="6574536"/>
-            <a:ext cx="11612880" cy="256032"/>
+            <a:ext cx="11612880" cy="261610"/>
           </a:xfrm>
           <a:prstGeom prst="rect">
             <a:avLst/>
@@ -13953,12 +14118,12 @@
           <a:p>
             <a:pPr algn="ctr"/>
             <a:r>
-              <a:rPr sz="1100" b="0" i="0">
+              <a:rPr sz="1100" b="0" i="0" dirty="0">
                 <a:solidFill>
                   <a:srgbClr val="BBDEFB"/>
                 </a:solidFill>
               </a:rPr>
-              <a:t>Smart Healthcare Appointment System  |  Mannat Vij</a:t>
+              <a:t>Smart Healthcare Appointment System  </a:t>
             </a:r>
           </a:p>
         </p:txBody>
@@ -14005,6 +14170,7 @@
           <a:lstStyle/>
           <a:p>
             <a:pPr algn="ctr"/>
+            <a:endParaRPr/>
           </a:p>
         </p:txBody>
       </p:sp>
@@ -14072,6 +14238,7 @@
           <a:lstStyle/>
           <a:p>
             <a:pPr algn="ctr"/>
+            <a:endParaRPr/>
           </a:p>
         </p:txBody>
       </p:sp>
@@ -14151,6 +14318,7 @@
           <a:lstStyle/>
           <a:p>
             <a:pPr algn="ctr"/>
+            <a:endParaRPr/>
           </a:p>
         </p:txBody>
       </p:sp>
@@ -14218,6 +14386,7 @@
           <a:lstStyle/>
           <a:p>
             <a:pPr algn="ctr"/>
+            <a:endParaRPr/>
           </a:p>
         </p:txBody>
       </p:sp>
